--- a/LOCUSAI—.pptx
+++ b/LOCUSAI—.pptx
@@ -1,34 +1,34 @@
 
 <file path=ppt/presentation.xml><?xml version="1.0" encoding="utf-8"?>
-<p:presentation xmlns:a="http://schemas.openxmlformats.org/drawingml/2006/main" xmlns:r="http://schemas.openxmlformats.org/officeDocument/2006/relationships" xmlns:p="http://schemas.openxmlformats.org/presentationml/2006/main" saveSubsetFonts="1" embedTrueTypeFonts="true">
+<p:presentation xmlns:a="http://schemas.openxmlformats.org/drawingml/2006/main" xmlns:r="http://schemas.openxmlformats.org/officeDocument/2006/relationships" xmlns:p="http://schemas.openxmlformats.org/presentationml/2006/main" embedTrueTypeFonts="1" saveSubsetFonts="1">
   <p:sldMasterIdLst>
     <p:sldMasterId id="2147483648" r:id="rId1"/>
   </p:sldMasterIdLst>
   <p:sldIdLst>
-    <p:sldId id="256" r:id="rId6"/>
-    <p:sldId id="257" r:id="rId7"/>
-    <p:sldId id="258" r:id="rId8"/>
-    <p:sldId id="259" r:id="rId9"/>
-    <p:sldId id="260" r:id="rId10"/>
-    <p:sldId id="261" r:id="rId11"/>
-    <p:sldId id="262" r:id="rId12"/>
-    <p:sldId id="263" r:id="rId13"/>
-    <p:sldId id="264" r:id="rId14"/>
+    <p:sldId id="256" r:id="rId2"/>
+    <p:sldId id="257" r:id="rId3"/>
+    <p:sldId id="258" r:id="rId4"/>
+    <p:sldId id="259" r:id="rId5"/>
+    <p:sldId id="260" r:id="rId6"/>
+    <p:sldId id="261" r:id="rId7"/>
+    <p:sldId id="262" r:id="rId8"/>
+    <p:sldId id="263" r:id="rId9"/>
+    <p:sldId id="264" r:id="rId10"/>
   </p:sldIdLst>
   <p:sldSz cx="18288000" cy="10287000"/>
   <p:notesSz cx="6858000" cy="9144000"/>
   <p:embeddedFontLst>
     <p:embeddedFont>
-      <p:font typeface="Montserrat Bold" charset="1" panose="00000800000000000000"/>
-      <p:regular r:id="rId15"/>
+      <p:font typeface="Montserrat Bold" panose="020B0604020202020204" charset="0"/>
+      <p:regular r:id="rId11"/>
     </p:embeddedFont>
     <p:embeddedFont>
-      <p:font typeface="Open Sans Bold" charset="1" panose="00000000000000000000"/>
-      <p:regular r:id="rId16"/>
+      <p:font typeface="Open Sans" panose="020B0606030504020204" pitchFamily="34" charset="0"/>
+      <p:regular r:id="rId12"/>
     </p:embeddedFont>
     <p:embeddedFont>
-      <p:font typeface="Open Sans" charset="1" panose="00000000000000000000"/>
-      <p:regular r:id="rId17"/>
+      <p:font typeface="Open Sans Bold" panose="020B0604020202020204" charset="0"/>
+      <p:regular r:id="rId13"/>
     </p:embeddedFont>
   </p:embeddedFontLst>
   <p:defaultTextStyle>
@@ -126,7 +126,60 @@
       </a:defRPr>
     </a:lvl9pPr>
   </p:defaultTextStyle>
+  <p:extLst>
+    <p:ext uri="{EFAFB233-063F-42B5-8137-9DF3F51BA10A}">
+      <p15:sldGuideLst xmlns:p15="http://schemas.microsoft.com/office/powerpoint/2012/main">
+        <p15:guide id="1" orient="horz" pos="2160">
+          <p15:clr>
+            <a:srgbClr val="A4A3A4"/>
+          </p15:clr>
+        </p15:guide>
+        <p15:guide id="2" pos="2880">
+          <p15:clr>
+            <a:srgbClr val="A4A3A4"/>
+          </p15:clr>
+        </p15:guide>
+      </p15:sldGuideLst>
+    </p:ext>
+  </p:extLst>
 </p:presentation>
+</file>
+
+<file path=ppt/changesInfos/changesInfo1.xml><?xml version="1.0" encoding="utf-8"?>
+<pc:chgInfo xmlns:a="http://schemas.openxmlformats.org/drawingml/2006/main" xmlns:r="http://schemas.openxmlformats.org/officeDocument/2006/relationships" xmlns:ac="http://schemas.microsoft.com/office/drawing/2013/main/command" xmlns:pc="http://schemas.microsoft.com/office/powerpoint/2013/main/command">
+  <pc:docChgLst>
+    <pc:chgData name="Rakesh R" userId="ee7ba3e0fb41c43a" providerId="LiveId" clId="{1EF856EC-E8DC-4364-A0C6-D56E505EC913}"/>
+    <pc:docChg chg="modSld">
+      <pc:chgData name="Rakesh R" userId="ee7ba3e0fb41c43a" providerId="LiveId" clId="{1EF856EC-E8DC-4364-A0C6-D56E505EC913}" dt="2026-10-10T23:19:58.968" v="52" actId="20577"/>
+      <pc:docMkLst>
+        <pc:docMk/>
+      </pc:docMkLst>
+      <pc:sldChg chg="modSp mod">
+        <pc:chgData name="Rakesh R" userId="ee7ba3e0fb41c43a" providerId="LiveId" clId="{1EF856EC-E8DC-4364-A0C6-D56E505EC913}" dt="2026-10-10T23:19:58.968" v="52" actId="20577"/>
+        <pc:sldMkLst>
+          <pc:docMk/>
+          <pc:sldMk cId="0" sldId="262"/>
+        </pc:sldMkLst>
+        <pc:spChg chg="mod">
+          <ac:chgData name="Rakesh R" userId="ee7ba3e0fb41c43a" providerId="LiveId" clId="{1EF856EC-E8DC-4364-A0C6-D56E505EC913}" dt="2026-10-10T23:19:36.369" v="0" actId="1076"/>
+          <ac:spMkLst>
+            <pc:docMk/>
+            <pc:sldMk cId="0" sldId="262"/>
+            <ac:spMk id="6" creationId="{00000000-0000-0000-0000-000000000000}"/>
+          </ac:spMkLst>
+        </pc:spChg>
+        <pc:spChg chg="mod">
+          <ac:chgData name="Rakesh R" userId="ee7ba3e0fb41c43a" providerId="LiveId" clId="{1EF856EC-E8DC-4364-A0C6-D56E505EC913}" dt="2026-10-10T23:19:58.968" v="52" actId="20577"/>
+          <ac:spMkLst>
+            <pc:docMk/>
+            <pc:sldMk cId="0" sldId="262"/>
+            <ac:spMk id="8" creationId="{00000000-0000-0000-0000-000000000000}"/>
+          </ac:spMkLst>
+        </pc:spChg>
+      </pc:sldChg>
+    </pc:docChg>
+  </pc:docChgLst>
+</pc:chgInfo>
 </file>
 
 <file path=ppt/slideLayouts/slideLayout1.xml><?xml version="1.0" encoding="utf-8"?>
@@ -167,10 +220,9 @@
           <a:lstStyle/>
           <a:p>
             <a:r>
-              <a:rPr lang="en-US" smtClean="0"/>
+              <a:rPr lang="en-US"/>
               <a:t>Click to edit Master title style</a:t>
             </a:r>
-            <a:endParaRPr lang="en-US"/>
           </a:p>
         </p:txBody>
       </p:sp>
@@ -286,10 +338,9 @@
           </a:lstStyle>
           <a:p>
             <a:r>
-              <a:rPr lang="en-US" smtClean="0"/>
+              <a:rPr lang="en-US"/>
               <a:t>Click to edit Master subtitle style</a:t>
             </a:r>
-            <a:endParaRPr lang="en-US"/>
           </a:p>
         </p:txBody>
       </p:sp>
@@ -311,7 +362,7 @@
             <a:fld id="{1D8BD707-D9CF-40AE-B4C6-C98DA3205C09}" type="datetimeFigureOut">
               <a:rPr lang="en-US" smtClean="0"/>
               <a:pPr/>
-              <a:t>8/1/2011</a:t>
+              <a:t>10/11/2026</a:t>
             </a:fld>
             <a:endParaRPr lang="en-US"/>
           </a:p>
@@ -401,10 +452,9 @@
           <a:lstStyle/>
           <a:p>
             <a:r>
-              <a:rPr lang="en-US" smtClean="0"/>
+              <a:rPr lang="en-US"/>
               <a:t>Click to edit Master title style</a:t>
             </a:r>
-            <a:endParaRPr lang="en-US"/>
           </a:p>
         </p:txBody>
       </p:sp>
@@ -425,38 +475,37 @@
           <a:p>
             <a:pPr lvl="0"/>
             <a:r>
-              <a:rPr lang="en-US" smtClean="0"/>
+              <a:rPr lang="en-US"/>
               <a:t>Click to edit Master text styles</a:t>
             </a:r>
           </a:p>
           <a:p>
             <a:pPr lvl="1"/>
             <a:r>
-              <a:rPr lang="en-US" smtClean="0"/>
+              <a:rPr lang="en-US"/>
               <a:t>Second level</a:t>
             </a:r>
           </a:p>
           <a:p>
             <a:pPr lvl="2"/>
             <a:r>
-              <a:rPr lang="en-US" smtClean="0"/>
+              <a:rPr lang="en-US"/>
               <a:t>Third level</a:t>
             </a:r>
           </a:p>
           <a:p>
             <a:pPr lvl="3"/>
             <a:r>
-              <a:rPr lang="en-US" smtClean="0"/>
+              <a:rPr lang="en-US"/>
               <a:t>Fourth level</a:t>
             </a:r>
           </a:p>
           <a:p>
             <a:pPr lvl="4"/>
             <a:r>
-              <a:rPr lang="en-US" smtClean="0"/>
+              <a:rPr lang="en-US"/>
               <a:t>Fifth level</a:t>
             </a:r>
-            <a:endParaRPr lang="en-US"/>
           </a:p>
         </p:txBody>
       </p:sp>
@@ -478,7 +527,7 @@
             <a:fld id="{1D8BD707-D9CF-40AE-B4C6-C98DA3205C09}" type="datetimeFigureOut">
               <a:rPr lang="en-US" smtClean="0"/>
               <a:pPr/>
-              <a:t>8/1/2011</a:t>
+              <a:t>10/11/2026</a:t>
             </a:fld>
             <a:endParaRPr lang="en-US"/>
           </a:p>
@@ -573,10 +622,9 @@
           <a:lstStyle/>
           <a:p>
             <a:r>
-              <a:rPr lang="en-US" smtClean="0"/>
+              <a:rPr lang="en-US"/>
               <a:t>Click to edit Master title style</a:t>
             </a:r>
-            <a:endParaRPr lang="en-US"/>
           </a:p>
         </p:txBody>
       </p:sp>
@@ -602,38 +650,37 @@
           <a:p>
             <a:pPr lvl="0"/>
             <a:r>
-              <a:rPr lang="en-US" smtClean="0"/>
+              <a:rPr lang="en-US"/>
               <a:t>Click to edit Master text styles</a:t>
             </a:r>
           </a:p>
           <a:p>
             <a:pPr lvl="1"/>
             <a:r>
-              <a:rPr lang="en-US" smtClean="0"/>
+              <a:rPr lang="en-US"/>
               <a:t>Second level</a:t>
             </a:r>
           </a:p>
           <a:p>
             <a:pPr lvl="2"/>
             <a:r>
-              <a:rPr lang="en-US" smtClean="0"/>
+              <a:rPr lang="en-US"/>
               <a:t>Third level</a:t>
             </a:r>
           </a:p>
           <a:p>
             <a:pPr lvl="3"/>
             <a:r>
-              <a:rPr lang="en-US" smtClean="0"/>
+              <a:rPr lang="en-US"/>
               <a:t>Fourth level</a:t>
             </a:r>
           </a:p>
           <a:p>
             <a:pPr lvl="4"/>
             <a:r>
-              <a:rPr lang="en-US" smtClean="0"/>
+              <a:rPr lang="en-US"/>
               <a:t>Fifth level</a:t>
             </a:r>
-            <a:endParaRPr lang="en-US"/>
           </a:p>
         </p:txBody>
       </p:sp>
@@ -655,7 +702,7 @@
             <a:fld id="{1D8BD707-D9CF-40AE-B4C6-C98DA3205C09}" type="datetimeFigureOut">
               <a:rPr lang="en-US" smtClean="0"/>
               <a:pPr/>
-              <a:t>8/1/2011</a:t>
+              <a:t>10/11/2026</a:t>
             </a:fld>
             <a:endParaRPr lang="en-US"/>
           </a:p>
@@ -745,10 +792,9 @@
           <a:lstStyle/>
           <a:p>
             <a:r>
-              <a:rPr lang="en-US" smtClean="0"/>
+              <a:rPr lang="en-US"/>
               <a:t>Click to edit Master title style</a:t>
             </a:r>
-            <a:endParaRPr lang="en-US"/>
           </a:p>
         </p:txBody>
       </p:sp>
@@ -769,38 +815,37 @@
           <a:p>
             <a:pPr lvl="0"/>
             <a:r>
-              <a:rPr lang="en-US" smtClean="0"/>
+              <a:rPr lang="en-US"/>
               <a:t>Click to edit Master text styles</a:t>
             </a:r>
           </a:p>
           <a:p>
             <a:pPr lvl="1"/>
             <a:r>
-              <a:rPr lang="en-US" smtClean="0"/>
+              <a:rPr lang="en-US"/>
               <a:t>Second level</a:t>
             </a:r>
           </a:p>
           <a:p>
             <a:pPr lvl="2"/>
             <a:r>
-              <a:rPr lang="en-US" smtClean="0"/>
+              <a:rPr lang="en-US"/>
               <a:t>Third level</a:t>
             </a:r>
           </a:p>
           <a:p>
             <a:pPr lvl="3"/>
             <a:r>
-              <a:rPr lang="en-US" smtClean="0"/>
+              <a:rPr lang="en-US"/>
               <a:t>Fourth level</a:t>
             </a:r>
           </a:p>
           <a:p>
             <a:pPr lvl="4"/>
             <a:r>
-              <a:rPr lang="en-US" smtClean="0"/>
+              <a:rPr lang="en-US"/>
               <a:t>Fifth level</a:t>
             </a:r>
-            <a:endParaRPr lang="en-US"/>
           </a:p>
         </p:txBody>
       </p:sp>
@@ -822,7 +867,7 @@
             <a:fld id="{1D8BD707-D9CF-40AE-B4C6-C98DA3205C09}" type="datetimeFigureOut">
               <a:rPr lang="en-US" smtClean="0"/>
               <a:pPr/>
-              <a:t>8/1/2011</a:t>
+              <a:t>10/11/2026</a:t>
             </a:fld>
             <a:endParaRPr lang="en-US"/>
           </a:p>
@@ -921,10 +966,9 @@
           </a:lstStyle>
           <a:p>
             <a:r>
-              <a:rPr lang="en-US" smtClean="0"/>
+              <a:rPr lang="en-US"/>
               <a:t>Click to edit Master title style</a:t>
             </a:r>
-            <a:endParaRPr lang="en-US"/>
           </a:p>
         </p:txBody>
       </p:sp>
@@ -1041,7 +1085,7 @@
           <a:p>
             <a:pPr lvl="0"/>
             <a:r>
-              <a:rPr lang="en-US" smtClean="0"/>
+              <a:rPr lang="en-US"/>
               <a:t>Click to edit Master text styles</a:t>
             </a:r>
           </a:p>
@@ -1065,7 +1109,7 @@
             <a:fld id="{1D8BD707-D9CF-40AE-B4C6-C98DA3205C09}" type="datetimeFigureOut">
               <a:rPr lang="en-US" smtClean="0"/>
               <a:pPr/>
-              <a:t>8/1/2011</a:t>
+              <a:t>10/11/2026</a:t>
             </a:fld>
             <a:endParaRPr lang="en-US"/>
           </a:p>
@@ -1155,10 +1199,9 @@
           <a:lstStyle/>
           <a:p>
             <a:r>
-              <a:rPr lang="en-US" smtClean="0"/>
+              <a:rPr lang="en-US"/>
               <a:t>Click to edit Master title style</a:t>
             </a:r>
-            <a:endParaRPr lang="en-US"/>
           </a:p>
         </p:txBody>
       </p:sp>
@@ -1212,38 +1255,37 @@
           <a:p>
             <a:pPr lvl="0"/>
             <a:r>
-              <a:rPr lang="en-US" smtClean="0"/>
+              <a:rPr lang="en-US"/>
               <a:t>Click to edit Master text styles</a:t>
             </a:r>
           </a:p>
           <a:p>
             <a:pPr lvl="1"/>
             <a:r>
-              <a:rPr lang="en-US" smtClean="0"/>
+              <a:rPr lang="en-US"/>
               <a:t>Second level</a:t>
             </a:r>
           </a:p>
           <a:p>
             <a:pPr lvl="2"/>
             <a:r>
-              <a:rPr lang="en-US" smtClean="0"/>
+              <a:rPr lang="en-US"/>
               <a:t>Third level</a:t>
             </a:r>
           </a:p>
           <a:p>
             <a:pPr lvl="3"/>
             <a:r>
-              <a:rPr lang="en-US" smtClean="0"/>
+              <a:rPr lang="en-US"/>
               <a:t>Fourth level</a:t>
             </a:r>
           </a:p>
           <a:p>
             <a:pPr lvl="4"/>
             <a:r>
-              <a:rPr lang="en-US" smtClean="0"/>
+              <a:rPr lang="en-US"/>
               <a:t>Fifth level</a:t>
             </a:r>
-            <a:endParaRPr lang="en-US"/>
           </a:p>
         </p:txBody>
       </p:sp>
@@ -1297,38 +1339,37 @@
           <a:p>
             <a:pPr lvl="0"/>
             <a:r>
-              <a:rPr lang="en-US" smtClean="0"/>
+              <a:rPr lang="en-US"/>
               <a:t>Click to edit Master text styles</a:t>
             </a:r>
           </a:p>
           <a:p>
             <a:pPr lvl="1"/>
             <a:r>
-              <a:rPr lang="en-US" smtClean="0"/>
+              <a:rPr lang="en-US"/>
               <a:t>Second level</a:t>
             </a:r>
           </a:p>
           <a:p>
             <a:pPr lvl="2"/>
             <a:r>
-              <a:rPr lang="en-US" smtClean="0"/>
+              <a:rPr lang="en-US"/>
               <a:t>Third level</a:t>
             </a:r>
           </a:p>
           <a:p>
             <a:pPr lvl="3"/>
             <a:r>
-              <a:rPr lang="en-US" smtClean="0"/>
+              <a:rPr lang="en-US"/>
               <a:t>Fourth level</a:t>
             </a:r>
           </a:p>
           <a:p>
             <a:pPr lvl="4"/>
             <a:r>
-              <a:rPr lang="en-US" smtClean="0"/>
+              <a:rPr lang="en-US"/>
               <a:t>Fifth level</a:t>
             </a:r>
-            <a:endParaRPr lang="en-US"/>
           </a:p>
         </p:txBody>
       </p:sp>
@@ -1350,7 +1391,7 @@
             <a:fld id="{1D8BD707-D9CF-40AE-B4C6-C98DA3205C09}" type="datetimeFigureOut">
               <a:rPr lang="en-US" smtClean="0"/>
               <a:pPr/>
-              <a:t>8/1/2011</a:t>
+              <a:t>10/11/2026</a:t>
             </a:fld>
             <a:endParaRPr lang="en-US"/>
           </a:p>
@@ -1444,10 +1485,9 @@
           </a:lstStyle>
           <a:p>
             <a:r>
-              <a:rPr lang="en-US" smtClean="0"/>
+              <a:rPr lang="en-US"/>
               <a:t>Click to edit Master title style</a:t>
             </a:r>
-            <a:endParaRPr lang="en-US"/>
           </a:p>
         </p:txBody>
       </p:sp>
@@ -1510,7 +1550,7 @@
           <a:p>
             <a:pPr lvl="0"/>
             <a:r>
-              <a:rPr lang="en-US" smtClean="0"/>
+              <a:rPr lang="en-US"/>
               <a:t>Click to edit Master text styles</a:t>
             </a:r>
           </a:p>
@@ -1566,38 +1606,37 @@
           <a:p>
             <a:pPr lvl="0"/>
             <a:r>
-              <a:rPr lang="en-US" smtClean="0"/>
+              <a:rPr lang="en-US"/>
               <a:t>Click to edit Master text styles</a:t>
             </a:r>
           </a:p>
           <a:p>
             <a:pPr lvl="1"/>
             <a:r>
-              <a:rPr lang="en-US" smtClean="0"/>
+              <a:rPr lang="en-US"/>
               <a:t>Second level</a:t>
             </a:r>
           </a:p>
           <a:p>
             <a:pPr lvl="2"/>
             <a:r>
-              <a:rPr lang="en-US" smtClean="0"/>
+              <a:rPr lang="en-US"/>
               <a:t>Third level</a:t>
             </a:r>
           </a:p>
           <a:p>
             <a:pPr lvl="3"/>
             <a:r>
-              <a:rPr lang="en-US" smtClean="0"/>
+              <a:rPr lang="en-US"/>
               <a:t>Fourth level</a:t>
             </a:r>
           </a:p>
           <a:p>
             <a:pPr lvl="4"/>
             <a:r>
-              <a:rPr lang="en-US" smtClean="0"/>
+              <a:rPr lang="en-US"/>
               <a:t>Fifth level</a:t>
             </a:r>
-            <a:endParaRPr lang="en-US"/>
           </a:p>
         </p:txBody>
       </p:sp>
@@ -1660,7 +1699,7 @@
           <a:p>
             <a:pPr lvl="0"/>
             <a:r>
-              <a:rPr lang="en-US" smtClean="0"/>
+              <a:rPr lang="en-US"/>
               <a:t>Click to edit Master text styles</a:t>
             </a:r>
           </a:p>
@@ -1716,38 +1755,37 @@
           <a:p>
             <a:pPr lvl="0"/>
             <a:r>
-              <a:rPr lang="en-US" smtClean="0"/>
+              <a:rPr lang="en-US"/>
               <a:t>Click to edit Master text styles</a:t>
             </a:r>
           </a:p>
           <a:p>
             <a:pPr lvl="1"/>
             <a:r>
-              <a:rPr lang="en-US" smtClean="0"/>
+              <a:rPr lang="en-US"/>
               <a:t>Second level</a:t>
             </a:r>
           </a:p>
           <a:p>
             <a:pPr lvl="2"/>
             <a:r>
-              <a:rPr lang="en-US" smtClean="0"/>
+              <a:rPr lang="en-US"/>
               <a:t>Third level</a:t>
             </a:r>
           </a:p>
           <a:p>
             <a:pPr lvl="3"/>
             <a:r>
-              <a:rPr lang="en-US" smtClean="0"/>
+              <a:rPr lang="en-US"/>
               <a:t>Fourth level</a:t>
             </a:r>
           </a:p>
           <a:p>
             <a:pPr lvl="4"/>
             <a:r>
-              <a:rPr lang="en-US" smtClean="0"/>
+              <a:rPr lang="en-US"/>
               <a:t>Fifth level</a:t>
             </a:r>
-            <a:endParaRPr lang="en-US"/>
           </a:p>
         </p:txBody>
       </p:sp>
@@ -1769,7 +1807,7 @@
             <a:fld id="{1D8BD707-D9CF-40AE-B4C6-C98DA3205C09}" type="datetimeFigureOut">
               <a:rPr lang="en-US" smtClean="0"/>
               <a:pPr/>
-              <a:t>8/1/2011</a:t>
+              <a:t>10/11/2026</a:t>
             </a:fld>
             <a:endParaRPr lang="en-US"/>
           </a:p>
@@ -1859,10 +1897,9 @@
           <a:lstStyle/>
           <a:p>
             <a:r>
-              <a:rPr lang="en-US" smtClean="0"/>
+              <a:rPr lang="en-US"/>
               <a:t>Click to edit Master title style</a:t>
             </a:r>
-            <a:endParaRPr lang="en-US"/>
           </a:p>
         </p:txBody>
       </p:sp>
@@ -1884,7 +1921,7 @@
             <a:fld id="{1D8BD707-D9CF-40AE-B4C6-C98DA3205C09}" type="datetimeFigureOut">
               <a:rPr lang="en-US" smtClean="0"/>
               <a:pPr/>
-              <a:t>8/1/2011</a:t>
+              <a:t>10/11/2026</a:t>
             </a:fld>
             <a:endParaRPr lang="en-US"/>
           </a:p>
@@ -1976,7 +2013,7 @@
             <a:fld id="{1D8BD707-D9CF-40AE-B4C6-C98DA3205C09}" type="datetimeFigureOut">
               <a:rPr lang="en-US" smtClean="0"/>
               <a:pPr/>
-              <a:t>8/1/2011</a:t>
+              <a:t>10/11/2026</a:t>
             </a:fld>
             <a:endParaRPr lang="en-US"/>
           </a:p>
@@ -2075,10 +2112,9 @@
           </a:lstStyle>
           <a:p>
             <a:r>
-              <a:rPr lang="en-US" smtClean="0"/>
+              <a:rPr lang="en-US"/>
               <a:t>Click to edit Master title style</a:t>
             </a:r>
-            <a:endParaRPr lang="en-US"/>
           </a:p>
         </p:txBody>
       </p:sp>
@@ -2132,38 +2168,37 @@
           <a:p>
             <a:pPr lvl="0"/>
             <a:r>
-              <a:rPr lang="en-US" smtClean="0"/>
+              <a:rPr lang="en-US"/>
               <a:t>Click to edit Master text styles</a:t>
             </a:r>
           </a:p>
           <a:p>
             <a:pPr lvl="1"/>
             <a:r>
-              <a:rPr lang="en-US" smtClean="0"/>
+              <a:rPr lang="en-US"/>
               <a:t>Second level</a:t>
             </a:r>
           </a:p>
           <a:p>
             <a:pPr lvl="2"/>
             <a:r>
-              <a:rPr lang="en-US" smtClean="0"/>
+              <a:rPr lang="en-US"/>
               <a:t>Third level</a:t>
             </a:r>
           </a:p>
           <a:p>
             <a:pPr lvl="3"/>
             <a:r>
-              <a:rPr lang="en-US" smtClean="0"/>
+              <a:rPr lang="en-US"/>
               <a:t>Fourth level</a:t>
             </a:r>
           </a:p>
           <a:p>
             <a:pPr lvl="4"/>
             <a:r>
-              <a:rPr lang="en-US" smtClean="0"/>
+              <a:rPr lang="en-US"/>
               <a:t>Fifth level</a:t>
             </a:r>
-            <a:endParaRPr lang="en-US"/>
           </a:p>
         </p:txBody>
       </p:sp>
@@ -2226,7 +2261,7 @@
           <a:p>
             <a:pPr lvl="0"/>
             <a:r>
-              <a:rPr lang="en-US" smtClean="0"/>
+              <a:rPr lang="en-US"/>
               <a:t>Click to edit Master text styles</a:t>
             </a:r>
           </a:p>
@@ -2250,7 +2285,7 @@
             <a:fld id="{1D8BD707-D9CF-40AE-B4C6-C98DA3205C09}" type="datetimeFigureOut">
               <a:rPr lang="en-US" smtClean="0"/>
               <a:pPr/>
-              <a:t>8/1/2011</a:t>
+              <a:t>10/11/2026</a:t>
             </a:fld>
             <a:endParaRPr lang="en-US"/>
           </a:p>
@@ -2349,10 +2384,9 @@
           </a:lstStyle>
           <a:p>
             <a:r>
-              <a:rPr lang="en-US" smtClean="0"/>
+              <a:rPr lang="en-US"/>
               <a:t>Click to edit Master title style</a:t>
             </a:r>
-            <a:endParaRPr lang="en-US"/>
           </a:p>
         </p:txBody>
       </p:sp>
@@ -2476,7 +2510,7 @@
           <a:p>
             <a:pPr lvl="0"/>
             <a:r>
-              <a:rPr lang="en-US" smtClean="0"/>
+              <a:rPr lang="en-US"/>
               <a:t>Click to edit Master text styles</a:t>
             </a:r>
           </a:p>
@@ -2500,7 +2534,7 @@
             <a:fld id="{1D8BD707-D9CF-40AE-B4C6-C98DA3205C09}" type="datetimeFigureOut">
               <a:rPr lang="en-US" smtClean="0"/>
               <a:pPr/>
-              <a:t>8/1/2011</a:t>
+              <a:t>10/11/2026</a:t>
             </a:fld>
             <a:endParaRPr lang="en-US"/>
           </a:p>
@@ -2605,10 +2639,9 @@
           <a:lstStyle/>
           <a:p>
             <a:r>
-              <a:rPr lang="en-US" smtClean="0"/>
+              <a:rPr lang="en-US"/>
               <a:t>Click to edit Master title style</a:t>
             </a:r>
-            <a:endParaRPr lang="en-US"/>
           </a:p>
         </p:txBody>
       </p:sp>
@@ -2639,38 +2672,37 @@
           <a:p>
             <a:pPr lvl="0"/>
             <a:r>
-              <a:rPr lang="en-US" smtClean="0"/>
+              <a:rPr lang="en-US"/>
               <a:t>Click to edit Master text styles</a:t>
             </a:r>
           </a:p>
           <a:p>
             <a:pPr lvl="1"/>
             <a:r>
-              <a:rPr lang="en-US" smtClean="0"/>
+              <a:rPr lang="en-US"/>
               <a:t>Second level</a:t>
             </a:r>
           </a:p>
           <a:p>
             <a:pPr lvl="2"/>
             <a:r>
-              <a:rPr lang="en-US" smtClean="0"/>
+              <a:rPr lang="en-US"/>
               <a:t>Third level</a:t>
             </a:r>
           </a:p>
           <a:p>
             <a:pPr lvl="3"/>
             <a:r>
-              <a:rPr lang="en-US" smtClean="0"/>
+              <a:rPr lang="en-US"/>
               <a:t>Fourth level</a:t>
             </a:r>
           </a:p>
           <a:p>
             <a:pPr lvl="4"/>
             <a:r>
-              <a:rPr lang="en-US" smtClean="0"/>
+              <a:rPr lang="en-US"/>
               <a:t>Fifth level</a:t>
             </a:r>
-            <a:endParaRPr lang="en-US"/>
           </a:p>
         </p:txBody>
       </p:sp>
@@ -2710,7 +2742,7 @@
             <a:fld id="{1D8BD707-D9CF-40AE-B4C6-C98DA3205C09}" type="datetimeFigureOut">
               <a:rPr lang="en-US" smtClean="0"/>
               <a:pPr/>
-              <a:t>8/1/2011</a:t>
+              <a:t>10/11/2026</a:t>
             </a:fld>
             <a:endParaRPr lang="en-US"/>
           </a:p>
@@ -3065,13 +3097,14 @@
 </file>
 
 <file path=ppt/slides/slide1.xml><?xml version="1.0" encoding="utf-8"?>
-<p:sld xmlns:p="http://schemas.openxmlformats.org/presentationml/2006/main" xmlns:a="http://schemas.openxmlformats.org/drawingml/2006/main" xmlns:r="http://schemas.openxmlformats.org/officeDocument/2006/relationships">
+<p:sld xmlns:a="http://schemas.openxmlformats.org/drawingml/2006/main" xmlns:r="http://schemas.openxmlformats.org/officeDocument/2006/relationships" xmlns:p="http://schemas.openxmlformats.org/presentationml/2006/main">
   <p:cSld>
     <p:bg>
       <p:bgPr>
         <a:solidFill>
           <a:srgbClr val="172B4D"/>
         </a:solidFill>
+        <a:effectLst/>
       </p:bgPr>
     </p:bg>
     <p:spTree>
@@ -3090,12 +3123,12 @@
       </p:grpSpPr>
       <p:grpSp>
         <p:nvGrpSpPr>
-          <p:cNvPr name="Group 2" id="2"/>
+          <p:cNvPr id="2" name="Group 2"/>
           <p:cNvGrpSpPr/>
           <p:nvPr/>
         </p:nvGrpSpPr>
         <p:grpSpPr>
-          <a:xfrm rot="0">
+          <a:xfrm>
             <a:off x="0" y="3684146"/>
             <a:ext cx="13205698" cy="6602854"/>
             <a:chOff x="0" y="0"/>
@@ -3104,12 +3137,12 @@
         </p:grpSpPr>
         <p:sp>
           <p:nvSpPr>
-            <p:cNvPr name="Freeform 3" id="3"/>
+            <p:cNvPr id="3" name="Freeform 3"/>
             <p:cNvSpPr/>
             <p:nvPr/>
           </p:nvSpPr>
           <p:spPr>
-            <a:xfrm flipH="false" flipV="false" rot="0">
+            <a:xfrm>
               <a:off x="0" y="0"/>
               <a:ext cx="17607535" cy="8803767"/>
             </a:xfrm>
@@ -3118,9 +3151,9 @@
               <a:gdLst/>
               <a:ahLst/>
               <a:cxnLst/>
-              <a:rect r="r" b="b" t="t" l="l"/>
+              <a:rect l="l" t="t" r="r" b="b"/>
               <a:pathLst>
-                <a:path h="8803767" w="17607535">
+                <a:path w="17607535" h="8803767">
                   <a:moveTo>
                     <a:pt x="8795639" y="0"/>
                   </a:moveTo>
@@ -3157,7 +3190,7 @@
             <a:blipFill>
               <a:blip r:embed="rId2"/>
               <a:stretch>
-                <a:fillRect l="0" t="0" r="0" b="0"/>
+                <a:fillRect/>
               </a:stretch>
             </a:blipFill>
           </p:spPr>
@@ -3165,12 +3198,12 @@
       </p:grpSp>
       <p:grpSp>
         <p:nvGrpSpPr>
-          <p:cNvPr name="Group 4" id="4"/>
+          <p:cNvPr id="4" name="Group 4"/>
           <p:cNvGrpSpPr/>
           <p:nvPr/>
         </p:nvGrpSpPr>
         <p:grpSpPr>
-          <a:xfrm rot="0">
+          <a:xfrm>
             <a:off x="11045047" y="3684146"/>
             <a:ext cx="7242953" cy="6602063"/>
             <a:chOff x="0" y="0"/>
@@ -3179,12 +3212,12 @@
         </p:grpSpPr>
         <p:sp>
           <p:nvSpPr>
-            <p:cNvPr name="Freeform 5" id="5"/>
+            <p:cNvPr id="5" name="Freeform 5"/>
             <p:cNvSpPr/>
             <p:nvPr/>
           </p:nvSpPr>
           <p:spPr>
-            <a:xfrm flipH="false" flipV="false" rot="0">
+            <a:xfrm>
               <a:off x="0" y="0"/>
               <a:ext cx="9657334" cy="8802751"/>
             </a:xfrm>
@@ -3193,9 +3226,9 @@
               <a:gdLst/>
               <a:ahLst/>
               <a:cxnLst/>
-              <a:rect r="r" b="b" t="t" l="l"/>
+              <a:rect l="l" t="t" r="r" b="b"/>
               <a:pathLst>
-                <a:path h="8802751" w="9657334">
+                <a:path w="9657334" h="8802751">
                   <a:moveTo>
                     <a:pt x="4831207" y="0"/>
                   </a:moveTo>
@@ -3240,7 +3273,7 @@
             <a:blipFill>
               <a:blip r:embed="rId3"/>
               <a:stretch>
-                <a:fillRect l="0" t="-11" r="-64" b="0"/>
+                <a:fillRect t="-11" r="-64"/>
               </a:stretch>
             </a:blipFill>
           </p:spPr>
@@ -3248,12 +3281,12 @@
       </p:grpSp>
       <p:grpSp>
         <p:nvGrpSpPr>
-          <p:cNvPr name="Group 6" id="6"/>
+          <p:cNvPr id="6" name="Group 6"/>
           <p:cNvGrpSpPr/>
           <p:nvPr/>
         </p:nvGrpSpPr>
         <p:grpSpPr>
-          <a:xfrm rot="0">
+          <a:xfrm>
             <a:off x="1028700" y="1028700"/>
             <a:ext cx="684590" cy="684590"/>
             <a:chOff x="0" y="0"/>
@@ -3262,12 +3295,12 @@
         </p:grpSpPr>
         <p:sp>
           <p:nvSpPr>
-            <p:cNvPr name="Freeform 7" id="7"/>
+            <p:cNvPr id="7" name="Freeform 7"/>
             <p:cNvSpPr/>
             <p:nvPr/>
           </p:nvSpPr>
           <p:spPr>
-            <a:xfrm flipH="false" flipV="false" rot="0">
+            <a:xfrm>
               <a:off x="0" y="0"/>
               <a:ext cx="912749" cy="912749"/>
             </a:xfrm>
@@ -3276,9 +3309,9 @@
               <a:gdLst/>
               <a:ahLst/>
               <a:cxnLst/>
-              <a:rect r="r" b="b" t="t" l="l"/>
+              <a:rect l="l" t="t" r="r" b="b"/>
               <a:pathLst>
-                <a:path h="912749" w="912749">
+                <a:path w="912749" h="912749">
                   <a:moveTo>
                     <a:pt x="455803" y="0"/>
                   </a:moveTo>
@@ -3312,7 +3345,7 @@
             <a:blipFill>
               <a:blip r:embed="rId4"/>
               <a:stretch>
-                <a:fillRect l="0" t="0" r="-4" b="-4"/>
+                <a:fillRect r="-4" b="-4"/>
               </a:stretch>
             </a:blipFill>
           </p:spPr>
@@ -3320,12 +3353,12 @@
       </p:grpSp>
       <p:sp>
         <p:nvSpPr>
-          <p:cNvPr name="Freeform 8" id="8"/>
+          <p:cNvPr id="8" name="Freeform 8"/>
           <p:cNvSpPr/>
           <p:nvPr/>
         </p:nvSpPr>
         <p:spPr>
-          <a:xfrm flipH="false" flipV="false" rot="0">
+          <a:xfrm>
             <a:off x="4707226" y="1278922"/>
             <a:ext cx="12615577" cy="155572"/>
           </a:xfrm>
@@ -3334,9 +3367,9 @@
             <a:gdLst/>
             <a:ahLst/>
             <a:cxnLst/>
-            <a:rect r="r" b="b" t="t" l="l"/>
+            <a:rect l="l" t="t" r="r" b="b"/>
             <a:pathLst>
-              <a:path h="155572" w="12615577">
+              <a:path w="12615577" h="155572">
                 <a:moveTo>
                   <a:pt x="0" y="0"/>
                 </a:moveTo>
@@ -3357,27 +3390,27 @@
             </a:pathLst>
           </a:custGeom>
           <a:blipFill>
-            <a:blip r:embed="rId5">
+            <a:blip>
               <a:extLst>
                 <a:ext uri="{96DAC541-7B7A-43D3-8B79-37D633B846F1}">
-                  <asvg:svgBlip xmlns:asvg="http://schemas.microsoft.com/office/drawing/2016/SVG/main" r:embed="rId6"/>
+                  <asvg:svgBlip xmlns:asvg="http://schemas.microsoft.com/office/drawing/2016/SVG/main" r:embed="rId5"/>
                 </a:ext>
               </a:extLst>
             </a:blip>
             <a:stretch>
-              <a:fillRect l="0" t="0" r="0" b="0"/>
+              <a:fillRect/>
             </a:stretch>
           </a:blipFill>
         </p:spPr>
       </p:sp>
       <p:sp>
         <p:nvSpPr>
-          <p:cNvPr name="TextBox 9" id="9"/>
-          <p:cNvSpPr txBox="true"/>
+          <p:cNvPr id="9" name="TextBox 9"/>
+          <p:cNvSpPr txBox="1"/>
           <p:nvPr/>
         </p:nvSpPr>
         <p:spPr>
-          <a:xfrm rot="0">
+          <a:xfrm>
             <a:off x="1028700" y="1716348"/>
             <a:ext cx="5955621" cy="6519596"/>
           </a:xfrm>
@@ -3386,7 +3419,7 @@
           </a:prstGeom>
         </p:spPr>
         <p:txBody>
-          <a:bodyPr anchor="t" rtlCol="false" tIns="0" lIns="0" bIns="0" rIns="0">
+          <a:bodyPr lIns="0" tIns="0" rIns="0" bIns="0" rtlCol="0" anchor="t">
             <a:spAutoFit/>
           </a:bodyPr>
           <a:lstStyle/>
@@ -3397,7 +3430,7 @@
               </a:lnSpc>
             </a:pPr>
             <a:r>
-              <a:rPr lang="en-US" b="true" sz="10992">
+              <a:rPr lang="en-US" sz="10992" b="1">
                 <a:solidFill>
                   <a:srgbClr val="F7F9FC"/>
                 </a:solidFill>
@@ -3415,17 +3448,26 @@
                 <a:spcPts val="27480"/>
               </a:lnSpc>
             </a:pPr>
-          </a:p>
-        </p:txBody>
-      </p:sp>
-      <p:sp>
-        <p:nvSpPr>
-          <p:cNvPr name="TextBox 10" id="10"/>
-          <p:cNvSpPr txBox="true"/>
+            <a:endParaRPr lang="en-US" sz="10992" b="1">
+              <a:solidFill>
+                <a:srgbClr val="F7F9FC"/>
+              </a:solidFill>
+              <a:latin typeface="Montserrat Bold"/>
+              <a:ea typeface="Montserrat Bold"/>
+              <a:cs typeface="Montserrat Bold"/>
+              <a:sym typeface="Montserrat Bold"/>
+            </a:endParaRPr>
+          </a:p>
+        </p:txBody>
+      </p:sp>
+      <p:sp>
+        <p:nvSpPr>
+          <p:cNvPr id="10" name="TextBox 10"/>
+          <p:cNvSpPr txBox="1"/>
           <p:nvPr/>
         </p:nvSpPr>
         <p:spPr>
-          <a:xfrm rot="0">
+          <a:xfrm>
             <a:off x="2112769" y="1128084"/>
             <a:ext cx="1483385" cy="441074"/>
           </a:xfrm>
@@ -3434,7 +3476,7 @@
           </a:prstGeom>
         </p:spPr>
         <p:txBody>
-          <a:bodyPr anchor="t" rtlCol="false" tIns="0" lIns="0" bIns="0" rIns="0">
+          <a:bodyPr lIns="0" tIns="0" rIns="0" bIns="0" rtlCol="0" anchor="t">
             <a:spAutoFit/>
           </a:bodyPr>
           <a:lstStyle/>
@@ -3445,7 +3487,7 @@
               </a:lnSpc>
             </a:pPr>
             <a:r>
-              <a:rPr lang="en-US" b="true" sz="2497">
+              <a:rPr lang="en-US" sz="2497" b="1">
                 <a:solidFill>
                   <a:srgbClr val="F7F9FC"/>
                 </a:solidFill>
@@ -3461,12 +3503,12 @@
       </p:sp>
       <p:sp>
         <p:nvSpPr>
-          <p:cNvPr name="TextBox 11" id="11"/>
-          <p:cNvSpPr txBox="true"/>
+          <p:cNvPr id="11" name="TextBox 11"/>
+          <p:cNvSpPr txBox="1"/>
           <p:nvPr/>
         </p:nvSpPr>
         <p:spPr>
-          <a:xfrm rot="0">
+          <a:xfrm>
             <a:off x="12674975" y="6929971"/>
             <a:ext cx="2881055" cy="926363"/>
           </a:xfrm>
@@ -3475,7 +3517,7 @@
           </a:prstGeom>
         </p:spPr>
         <p:txBody>
-          <a:bodyPr anchor="t" rtlCol="false" tIns="0" lIns="0" bIns="0" rIns="0">
+          <a:bodyPr lIns="0" tIns="0" rIns="0" bIns="0" rtlCol="0" anchor="t">
             <a:spAutoFit/>
           </a:bodyPr>
           <a:lstStyle/>
@@ -3486,7 +3528,7 @@
               </a:lnSpc>
             </a:pPr>
             <a:r>
-              <a:rPr lang="en-US" b="true" sz="2497">
+              <a:rPr lang="en-US" sz="2497" b="1">
                 <a:solidFill>
                   <a:srgbClr val="F7F9FC"/>
                 </a:solidFill>
@@ -3521,12 +3563,12 @@
       </p:sp>
       <p:sp>
         <p:nvSpPr>
-          <p:cNvPr name="TextBox 12" id="12"/>
-          <p:cNvSpPr txBox="true"/>
+          <p:cNvPr id="12" name="TextBox 12"/>
+          <p:cNvSpPr txBox="1"/>
           <p:nvPr/>
         </p:nvSpPr>
         <p:spPr>
-          <a:xfrm rot="0">
+          <a:xfrm>
             <a:off x="12674975" y="8324860"/>
             <a:ext cx="1981190" cy="926363"/>
           </a:xfrm>
@@ -3535,7 +3577,7 @@
           </a:prstGeom>
         </p:spPr>
         <p:txBody>
-          <a:bodyPr anchor="t" rtlCol="false" tIns="0" lIns="0" bIns="0" rIns="0">
+          <a:bodyPr lIns="0" tIns="0" rIns="0" bIns="0" rtlCol="0" anchor="t">
             <a:spAutoFit/>
           </a:bodyPr>
           <a:lstStyle/>
@@ -3546,7 +3588,7 @@
               </a:lnSpc>
             </a:pPr>
             <a:r>
-              <a:rPr lang="en-US" b="true" sz="2497">
+              <a:rPr lang="en-US" sz="2497" b="1">
                 <a:solidFill>
                   <a:srgbClr val="F7F9FC"/>
                 </a:solidFill>
@@ -3581,12 +3623,12 @@
       </p:sp>
       <p:sp>
         <p:nvSpPr>
-          <p:cNvPr name="TextBox 13" id="13"/>
-          <p:cNvSpPr txBox="true"/>
+          <p:cNvPr id="13" name="TextBox 13"/>
+          <p:cNvSpPr txBox="1"/>
           <p:nvPr/>
         </p:nvSpPr>
         <p:spPr>
-          <a:xfrm rot="0">
+          <a:xfrm>
             <a:off x="6395676" y="1716348"/>
             <a:ext cx="5955621" cy="3033446"/>
           </a:xfrm>
@@ -3595,7 +3637,7 @@
           </a:prstGeom>
         </p:spPr>
         <p:txBody>
-          <a:bodyPr anchor="t" rtlCol="false" tIns="0" lIns="0" bIns="0" rIns="0">
+          <a:bodyPr lIns="0" tIns="0" rIns="0" bIns="0" rtlCol="0" anchor="t">
             <a:spAutoFit/>
           </a:bodyPr>
           <a:lstStyle/>
@@ -3606,7 +3648,7 @@
               </a:lnSpc>
             </a:pPr>
             <a:r>
-              <a:rPr lang="en-US" b="true" sz="10992">
+              <a:rPr lang="en-US" sz="10992" b="1">
                 <a:solidFill>
                   <a:srgbClr val="F7F9FC"/>
                 </a:solidFill>
@@ -3622,12 +3664,12 @@
       </p:sp>
       <p:sp>
         <p:nvSpPr>
-          <p:cNvPr name="TextBox 14" id="14"/>
-          <p:cNvSpPr txBox="true"/>
+          <p:cNvPr id="14" name="TextBox 14"/>
+          <p:cNvSpPr txBox="1"/>
           <p:nvPr/>
         </p:nvSpPr>
         <p:spPr>
-          <a:xfrm rot="0">
+          <a:xfrm>
             <a:off x="1109956" y="4721219"/>
             <a:ext cx="6707615" cy="406445"/>
           </a:xfrm>
@@ -3636,7 +3678,7 @@
           </a:prstGeom>
         </p:spPr>
         <p:txBody>
-          <a:bodyPr anchor="t" rtlCol="false" tIns="0" lIns="0" bIns="0" rIns="0">
+          <a:bodyPr lIns="0" tIns="0" rIns="0" bIns="0" rtlCol="0" anchor="t">
             <a:spAutoFit/>
           </a:bodyPr>
           <a:lstStyle/>
@@ -3673,13 +3715,14 @@
 </file>
 
 <file path=ppt/slides/slide2.xml><?xml version="1.0" encoding="utf-8"?>
-<p:sld xmlns:p="http://schemas.openxmlformats.org/presentationml/2006/main" xmlns:a="http://schemas.openxmlformats.org/drawingml/2006/main" xmlns:r="http://schemas.openxmlformats.org/officeDocument/2006/relationships">
+<p:sld xmlns:a="http://schemas.openxmlformats.org/drawingml/2006/main" xmlns:r="http://schemas.openxmlformats.org/officeDocument/2006/relationships" xmlns:p="http://schemas.openxmlformats.org/presentationml/2006/main">
   <p:cSld>
     <p:bg>
       <p:bgPr>
         <a:solidFill>
           <a:srgbClr val="172B4D"/>
         </a:solidFill>
+        <a:effectLst/>
       </p:bgPr>
     </p:bg>
     <p:spTree>
@@ -3698,12 +3741,12 @@
       </p:grpSpPr>
       <p:grpSp>
         <p:nvGrpSpPr>
-          <p:cNvPr name="Group 2" id="2"/>
+          <p:cNvPr id="2" name="Group 2"/>
           <p:cNvGrpSpPr/>
           <p:nvPr/>
         </p:nvGrpSpPr>
         <p:grpSpPr>
-          <a:xfrm rot="0">
+          <a:xfrm>
             <a:off x="9144000" y="5262667"/>
             <a:ext cx="9144000" cy="5024333"/>
             <a:chOff x="0" y="0"/>
@@ -3712,12 +3755,12 @@
         </p:grpSpPr>
         <p:sp>
           <p:nvSpPr>
-            <p:cNvPr name="Freeform 3" id="3"/>
+            <p:cNvPr id="3" name="Freeform 3"/>
             <p:cNvSpPr/>
             <p:nvPr/>
           </p:nvSpPr>
           <p:spPr>
-            <a:xfrm flipH="false" flipV="false" rot="0">
+            <a:xfrm>
               <a:off x="0" y="0"/>
               <a:ext cx="12192000" cy="6699123"/>
             </a:xfrm>
@@ -3726,9 +3769,9 @@
               <a:gdLst/>
               <a:ahLst/>
               <a:cxnLst/>
-              <a:rect r="r" b="b" t="t" l="l"/>
+              <a:rect l="l" t="t" r="r" b="b"/>
               <a:pathLst>
-                <a:path h="6699123" w="12192000">
+                <a:path w="12192000" h="6699123">
                   <a:moveTo>
                     <a:pt x="6699123" y="0"/>
                   </a:moveTo>
@@ -3768,7 +3811,7 @@
             <a:blipFill>
               <a:blip r:embed="rId2"/>
               <a:stretch>
-                <a:fillRect l="0" t="0" r="-9893" b="0"/>
+                <a:fillRect r="-9893"/>
               </a:stretch>
             </a:blipFill>
           </p:spPr>
@@ -3776,12 +3819,12 @@
       </p:grpSp>
       <p:grpSp>
         <p:nvGrpSpPr>
-          <p:cNvPr name="Group 4" id="4"/>
+          <p:cNvPr id="4" name="Group 4"/>
           <p:cNvGrpSpPr/>
           <p:nvPr/>
         </p:nvGrpSpPr>
         <p:grpSpPr>
-          <a:xfrm rot="0">
+          <a:xfrm>
             <a:off x="8921972" y="1028700"/>
             <a:ext cx="8337328" cy="8147437"/>
             <a:chOff x="0" y="0"/>
@@ -3790,12 +3833,12 @@
         </p:grpSpPr>
         <p:sp>
           <p:nvSpPr>
-            <p:cNvPr name="Freeform 5" id="5"/>
+            <p:cNvPr id="5" name="Freeform 5"/>
             <p:cNvSpPr/>
             <p:nvPr/>
           </p:nvSpPr>
           <p:spPr>
-            <a:xfrm flipH="false" flipV="false" rot="0">
+            <a:xfrm>
               <a:off x="0" y="0"/>
               <a:ext cx="11116437" cy="10863199"/>
             </a:xfrm>
@@ -3804,9 +3847,9 @@
               <a:gdLst/>
               <a:ahLst/>
               <a:cxnLst/>
-              <a:rect r="r" b="b" t="t" l="l"/>
+              <a:rect l="l" t="t" r="r" b="b"/>
               <a:pathLst>
-                <a:path h="10863199" w="11116437">
+                <a:path w="11116437" h="10863199">
                   <a:moveTo>
                     <a:pt x="381000" y="0"/>
                   </a:moveTo>
@@ -3846,7 +3889,7 @@
             <a:blipFill>
               <a:blip r:embed="rId3"/>
               <a:stretch>
-                <a:fillRect l="0" t="-333" r="-12" b="-447"/>
+                <a:fillRect t="-333" r="-12" b="-447"/>
               </a:stretch>
             </a:blipFill>
           </p:spPr>
@@ -3854,12 +3897,12 @@
       </p:grpSp>
       <p:sp>
         <p:nvSpPr>
-          <p:cNvPr name="TextBox 6" id="6"/>
-          <p:cNvSpPr txBox="true"/>
+          <p:cNvPr id="6" name="TextBox 6"/>
+          <p:cNvSpPr txBox="1"/>
           <p:nvPr/>
         </p:nvSpPr>
         <p:spPr>
-          <a:xfrm rot="0">
+          <a:xfrm>
             <a:off x="1028700" y="1383799"/>
             <a:ext cx="6940108" cy="7551844"/>
           </a:xfrm>
@@ -3868,7 +3911,7 @@
           </a:prstGeom>
         </p:spPr>
         <p:txBody>
-          <a:bodyPr anchor="t" rtlCol="false" tIns="0" lIns="0" bIns="0" rIns="0">
+          <a:bodyPr lIns="0" tIns="0" rIns="0" bIns="0" rtlCol="0" anchor="t">
             <a:spAutoFit/>
           </a:bodyPr>
           <a:lstStyle/>
@@ -3879,7 +3922,7 @@
               </a:lnSpc>
             </a:pPr>
             <a:r>
-              <a:rPr lang="en-US" b="true" sz="7962">
+              <a:rPr lang="en-US" sz="7962" b="1">
                 <a:solidFill>
                   <a:srgbClr val="F7F9FC"/>
                 </a:solidFill>
@@ -3898,7 +3941,7 @@
               </a:lnSpc>
             </a:pPr>
             <a:r>
-              <a:rPr lang="en-US" b="true" sz="7962">
+              <a:rPr lang="en-US" sz="7962" b="1">
                 <a:solidFill>
                   <a:srgbClr val="F7F9FC"/>
                 </a:solidFill>
@@ -3933,12 +3976,12 @@
       </p:sp>
       <p:sp>
         <p:nvSpPr>
-          <p:cNvPr name="TextBox 7" id="7"/>
-          <p:cNvSpPr txBox="true"/>
+          <p:cNvPr id="7" name="TextBox 7"/>
+          <p:cNvSpPr txBox="1"/>
           <p:nvPr/>
         </p:nvSpPr>
         <p:spPr>
-          <a:xfrm rot="0">
+          <a:xfrm>
             <a:off x="3167460" y="1383799"/>
             <a:ext cx="2588086" cy="1339919"/>
           </a:xfrm>
@@ -3947,7 +3990,7 @@
           </a:prstGeom>
         </p:spPr>
         <p:txBody>
-          <a:bodyPr anchor="t" rtlCol="false" tIns="0" lIns="0" bIns="0" rIns="0">
+          <a:bodyPr lIns="0" tIns="0" rIns="0" bIns="0" rtlCol="0" anchor="t">
             <a:spAutoFit/>
           </a:bodyPr>
           <a:lstStyle/>
@@ -3961,7 +4004,7 @@
               </a:spcBef>
             </a:pPr>
             <a:r>
-              <a:rPr lang="en-US" b="true" sz="7901">
+              <a:rPr lang="en-US" sz="7901" b="1">
                 <a:solidFill>
                   <a:srgbClr val="F7F9FC"/>
                 </a:solidFill>
@@ -3984,13 +4027,14 @@
 </file>
 
 <file path=ppt/slides/slide3.xml><?xml version="1.0" encoding="utf-8"?>
-<p:sld xmlns:p="http://schemas.openxmlformats.org/presentationml/2006/main" xmlns:a="http://schemas.openxmlformats.org/drawingml/2006/main" xmlns:r="http://schemas.openxmlformats.org/officeDocument/2006/relationships">
+<p:sld xmlns:a="http://schemas.openxmlformats.org/drawingml/2006/main" xmlns:r="http://schemas.openxmlformats.org/officeDocument/2006/relationships" xmlns:p="http://schemas.openxmlformats.org/presentationml/2006/main">
   <p:cSld>
     <p:bg>
       <p:bgPr>
         <a:solidFill>
           <a:srgbClr val="172B4D"/>
         </a:solidFill>
+        <a:effectLst/>
       </p:bgPr>
     </p:bg>
     <p:spTree>
@@ -4009,12 +4053,12 @@
       </p:grpSpPr>
       <p:sp>
         <p:nvSpPr>
-          <p:cNvPr name="Freeform 2" id="2"/>
+          <p:cNvPr id="2" name="Freeform 2"/>
           <p:cNvSpPr/>
           <p:nvPr/>
         </p:nvSpPr>
         <p:spPr>
-          <a:xfrm flipH="false" flipV="false" rot="0">
+          <a:xfrm>
             <a:off x="1028700" y="6687217"/>
             <a:ext cx="5212956" cy="2304860"/>
           </a:xfrm>
@@ -4023,9 +4067,9 @@
             <a:gdLst/>
             <a:ahLst/>
             <a:cxnLst/>
-            <a:rect r="r" b="b" t="t" l="l"/>
+            <a:rect l="l" t="t" r="r" b="b"/>
             <a:pathLst>
-              <a:path h="2304860" w="5212956">
+              <a:path w="5212956" h="2304860">
                 <a:moveTo>
                   <a:pt x="0" y="0"/>
                 </a:moveTo>
@@ -4046,27 +4090,27 @@
             </a:pathLst>
           </a:custGeom>
           <a:blipFill>
-            <a:blip r:embed="rId2">
+            <a:blip>
               <a:extLst>
                 <a:ext uri="{96DAC541-7B7A-43D3-8B79-37D633B846F1}">
-                  <asvg:svgBlip xmlns:asvg="http://schemas.microsoft.com/office/drawing/2016/SVG/main" r:embed="rId3"/>
+                  <asvg:svgBlip xmlns:asvg="http://schemas.microsoft.com/office/drawing/2016/SVG/main" r:embed="rId2"/>
                 </a:ext>
               </a:extLst>
             </a:blip>
             <a:stretch>
-              <a:fillRect l="0" t="0" r="0" b="0"/>
+              <a:fillRect/>
             </a:stretch>
           </a:blipFill>
         </p:spPr>
       </p:sp>
       <p:sp>
         <p:nvSpPr>
-          <p:cNvPr name="Freeform 3" id="3"/>
+          <p:cNvPr id="3" name="Freeform 3"/>
           <p:cNvSpPr/>
           <p:nvPr/>
         </p:nvSpPr>
         <p:spPr>
-          <a:xfrm flipH="false" flipV="false" rot="0">
+          <a:xfrm>
             <a:off x="1028700" y="3918937"/>
             <a:ext cx="5209365" cy="2339645"/>
           </a:xfrm>
@@ -4075,9 +4119,9 @@
             <a:gdLst/>
             <a:ahLst/>
             <a:cxnLst/>
-            <a:rect r="r" b="b" t="t" l="l"/>
+            <a:rect l="l" t="t" r="r" b="b"/>
             <a:pathLst>
-              <a:path h="2339645" w="5209365">
+              <a:path w="5209365" h="2339645">
                 <a:moveTo>
                   <a:pt x="0" y="0"/>
                 </a:moveTo>
@@ -4098,27 +4142,27 @@
             </a:pathLst>
           </a:custGeom>
           <a:blipFill>
-            <a:blip r:embed="rId4">
+            <a:blip>
               <a:extLst>
                 <a:ext uri="{96DAC541-7B7A-43D3-8B79-37D633B846F1}">
-                  <asvg:svgBlip xmlns:asvg="http://schemas.microsoft.com/office/drawing/2016/SVG/main" r:embed="rId5"/>
+                  <asvg:svgBlip xmlns:asvg="http://schemas.microsoft.com/office/drawing/2016/SVG/main" r:embed="rId3"/>
                 </a:ext>
               </a:extLst>
             </a:blip>
             <a:stretch>
-              <a:fillRect l="0" t="0" r="0" b="0"/>
+              <a:fillRect/>
             </a:stretch>
           </a:blipFill>
         </p:spPr>
       </p:sp>
       <p:sp>
         <p:nvSpPr>
-          <p:cNvPr name="Freeform 4" id="4"/>
+          <p:cNvPr id="4" name="Freeform 4"/>
           <p:cNvSpPr/>
           <p:nvPr/>
         </p:nvSpPr>
         <p:spPr>
-          <a:xfrm flipH="false" flipV="false" rot="0">
+          <a:xfrm>
             <a:off x="6461065" y="6687217"/>
             <a:ext cx="5212956" cy="2304860"/>
           </a:xfrm>
@@ -4127,9 +4171,9 @@
             <a:gdLst/>
             <a:ahLst/>
             <a:cxnLst/>
-            <a:rect r="r" b="b" t="t" l="l"/>
+            <a:rect l="l" t="t" r="r" b="b"/>
             <a:pathLst>
-              <a:path h="2304860" w="5212956">
+              <a:path w="5212956" h="2304860">
                 <a:moveTo>
                   <a:pt x="0" y="0"/>
                 </a:moveTo>
@@ -4150,27 +4194,27 @@
             </a:pathLst>
           </a:custGeom>
           <a:blipFill>
-            <a:blip r:embed="rId2">
+            <a:blip>
               <a:extLst>
                 <a:ext uri="{96DAC541-7B7A-43D3-8B79-37D633B846F1}">
-                  <asvg:svgBlip xmlns:asvg="http://schemas.microsoft.com/office/drawing/2016/SVG/main" r:embed="rId6"/>
+                  <asvg:svgBlip xmlns:asvg="http://schemas.microsoft.com/office/drawing/2016/SVG/main" r:embed="rId4"/>
                 </a:ext>
               </a:extLst>
             </a:blip>
             <a:stretch>
-              <a:fillRect l="0" t="0" r="0" b="0"/>
+              <a:fillRect/>
             </a:stretch>
           </a:blipFill>
         </p:spPr>
       </p:sp>
       <p:sp>
         <p:nvSpPr>
-          <p:cNvPr name="Freeform 5" id="5"/>
+          <p:cNvPr id="5" name="Freeform 5"/>
           <p:cNvSpPr/>
           <p:nvPr/>
         </p:nvSpPr>
         <p:spPr>
-          <a:xfrm flipH="false" flipV="false" rot="0">
+          <a:xfrm>
             <a:off x="6461065" y="3918937"/>
             <a:ext cx="5209365" cy="2339645"/>
           </a:xfrm>
@@ -4179,9 +4223,9 @@
             <a:gdLst/>
             <a:ahLst/>
             <a:cxnLst/>
-            <a:rect r="r" b="b" t="t" l="l"/>
+            <a:rect l="l" t="t" r="r" b="b"/>
             <a:pathLst>
-              <a:path h="2339645" w="5209365">
+              <a:path w="5209365" h="2339645">
                 <a:moveTo>
                   <a:pt x="0" y="0"/>
                 </a:moveTo>
@@ -4202,27 +4246,27 @@
             </a:pathLst>
           </a:custGeom>
           <a:blipFill>
-            <a:blip r:embed="rId4">
+            <a:blip>
               <a:extLst>
                 <a:ext uri="{96DAC541-7B7A-43D3-8B79-37D633B846F1}">
-                  <asvg:svgBlip xmlns:asvg="http://schemas.microsoft.com/office/drawing/2016/SVG/main" r:embed="rId7"/>
+                  <asvg:svgBlip xmlns:asvg="http://schemas.microsoft.com/office/drawing/2016/SVG/main" r:embed="rId5"/>
                 </a:ext>
               </a:extLst>
             </a:blip>
             <a:stretch>
-              <a:fillRect l="0" t="0" r="0" b="0"/>
+              <a:fillRect/>
             </a:stretch>
           </a:blipFill>
         </p:spPr>
       </p:sp>
       <p:grpSp>
         <p:nvGrpSpPr>
-          <p:cNvPr name="Group 6" id="6"/>
+          <p:cNvPr id="6" name="Group 6"/>
           <p:cNvGrpSpPr/>
           <p:nvPr/>
         </p:nvGrpSpPr>
         <p:grpSpPr>
-          <a:xfrm rot="0">
+          <a:xfrm>
             <a:off x="11893610" y="0"/>
             <a:ext cx="3867150" cy="10287000"/>
             <a:chOff x="0" y="0"/>
@@ -4231,12 +4275,12 @@
         </p:grpSpPr>
         <p:sp>
           <p:nvSpPr>
-            <p:cNvPr name="Freeform 7" id="7"/>
+            <p:cNvPr id="7" name="Freeform 7"/>
             <p:cNvSpPr/>
             <p:nvPr/>
           </p:nvSpPr>
           <p:spPr>
-            <a:xfrm flipH="false" flipV="false" rot="0">
+            <a:xfrm>
               <a:off x="0" y="0"/>
               <a:ext cx="5156200" cy="13716000"/>
             </a:xfrm>
@@ -4245,9 +4289,9 @@
               <a:gdLst/>
               <a:ahLst/>
               <a:cxnLst/>
-              <a:rect r="r" b="b" t="t" l="l"/>
+              <a:rect l="l" t="t" r="r" b="b"/>
               <a:pathLst>
-                <a:path h="13716000" w="5156200">
+                <a:path w="5156200" h="13716000">
                   <a:moveTo>
                     <a:pt x="254000" y="0"/>
                   </a:moveTo>
@@ -4285,9 +4329,9 @@
               </a:pathLst>
             </a:custGeom>
             <a:blipFill>
-              <a:blip r:embed="rId8"/>
+              <a:blip r:embed="rId6"/>
               <a:stretch>
-                <a:fillRect l="-3032" t="0" r="-3125" b="0"/>
+                <a:fillRect l="-3032" r="-3125"/>
               </a:stretch>
             </a:blipFill>
           </p:spPr>
@@ -4295,12 +4339,12 @@
       </p:grpSp>
       <p:grpSp>
         <p:nvGrpSpPr>
-          <p:cNvPr name="Group 8" id="8"/>
+          <p:cNvPr id="8" name="Group 8"/>
           <p:cNvGrpSpPr/>
           <p:nvPr/>
         </p:nvGrpSpPr>
         <p:grpSpPr>
-          <a:xfrm rot="0">
+          <a:xfrm>
             <a:off x="14514176" y="3570141"/>
             <a:ext cx="3773824" cy="6715125"/>
             <a:chOff x="0" y="0"/>
@@ -4309,12 +4353,12 @@
         </p:grpSpPr>
         <p:sp>
           <p:nvSpPr>
-            <p:cNvPr name="Freeform 9" id="9"/>
+            <p:cNvPr id="9" name="Freeform 9"/>
             <p:cNvSpPr/>
             <p:nvPr/>
           </p:nvSpPr>
           <p:spPr>
-            <a:xfrm flipH="false" flipV="false" rot="0">
+            <a:xfrm>
               <a:off x="0" y="0"/>
               <a:ext cx="5031740" cy="8953500"/>
             </a:xfrm>
@@ -4323,9 +4367,9 @@
               <a:gdLst/>
               <a:ahLst/>
               <a:cxnLst/>
-              <a:rect r="r" b="b" t="t" l="l"/>
+              <a:rect l="l" t="t" r="r" b="b"/>
               <a:pathLst>
-                <a:path h="8953500" w="5031740">
+                <a:path w="5031740" h="8953500">
                   <a:moveTo>
                     <a:pt x="254000" y="0"/>
                   </a:moveTo>
@@ -4353,9 +4397,9 @@
               </a:pathLst>
             </a:custGeom>
             <a:blipFill>
-              <a:blip r:embed="rId9"/>
+              <a:blip r:embed="rId7"/>
               <a:stretch>
-                <a:fillRect l="-3533" t="0" r="-8278" b="0"/>
+                <a:fillRect l="-3533" r="-8278"/>
               </a:stretch>
             </a:blipFill>
           </p:spPr>
@@ -4363,12 +4407,12 @@
       </p:grpSp>
       <p:grpSp>
         <p:nvGrpSpPr>
-          <p:cNvPr name="Group 10" id="10"/>
+          <p:cNvPr id="10" name="Group 10"/>
           <p:cNvGrpSpPr/>
           <p:nvPr/>
         </p:nvGrpSpPr>
         <p:grpSpPr>
-          <a:xfrm rot="0">
+          <a:xfrm>
             <a:off x="1028700" y="3918937"/>
             <a:ext cx="5213480" cy="2339645"/>
             <a:chOff x="0" y="0"/>
@@ -4377,12 +4421,12 @@
         </p:grpSpPr>
         <p:sp>
           <p:nvSpPr>
-            <p:cNvPr name="Freeform 11" id="11"/>
+            <p:cNvPr id="11" name="Freeform 11"/>
             <p:cNvSpPr/>
             <p:nvPr/>
           </p:nvSpPr>
           <p:spPr>
-            <a:xfrm flipH="false" flipV="false" rot="0">
+            <a:xfrm>
               <a:off x="0" y="0"/>
               <a:ext cx="5213478" cy="2339593"/>
             </a:xfrm>
@@ -4391,9 +4435,9 @@
               <a:gdLst/>
               <a:ahLst/>
               <a:cxnLst/>
-              <a:rect r="r" b="b" t="t" l="l"/>
+              <a:rect l="l" t="t" r="r" b="b"/>
               <a:pathLst>
-                <a:path h="2339593" w="5213478">
+                <a:path w="5213478" h="2339593">
                   <a:moveTo>
                     <a:pt x="0" y="2339593"/>
                   </a:moveTo>
@@ -4420,12 +4464,12 @@
       </p:grpSp>
       <p:grpSp>
         <p:nvGrpSpPr>
-          <p:cNvPr name="Group 12" id="12"/>
+          <p:cNvPr id="12" name="Group 12"/>
           <p:cNvGrpSpPr/>
           <p:nvPr/>
         </p:nvGrpSpPr>
         <p:grpSpPr>
-          <a:xfrm rot="0">
+          <a:xfrm>
             <a:off x="1028700" y="6687217"/>
             <a:ext cx="5213480" cy="2304860"/>
             <a:chOff x="0" y="0"/>
@@ -4434,12 +4478,12 @@
         </p:grpSpPr>
         <p:sp>
           <p:nvSpPr>
-            <p:cNvPr name="Freeform 13" id="13"/>
+            <p:cNvPr id="13" name="Freeform 13"/>
             <p:cNvSpPr/>
             <p:nvPr/>
           </p:nvSpPr>
           <p:spPr>
-            <a:xfrm flipH="false" flipV="false" rot="0">
+            <a:xfrm>
               <a:off x="0" y="0"/>
               <a:ext cx="5213478" cy="2304919"/>
             </a:xfrm>
@@ -4448,9 +4492,9 @@
               <a:gdLst/>
               <a:ahLst/>
               <a:cxnLst/>
-              <a:rect r="r" b="b" t="t" l="l"/>
+              <a:rect l="l" t="t" r="r" b="b"/>
               <a:pathLst>
-                <a:path h="2304919" w="5213478">
+                <a:path w="5213478" h="2304919">
                   <a:moveTo>
                     <a:pt x="0" y="2304919"/>
                   </a:moveTo>
@@ -4477,12 +4521,12 @@
       </p:grpSp>
       <p:grpSp>
         <p:nvGrpSpPr>
-          <p:cNvPr name="Group 14" id="14"/>
+          <p:cNvPr id="14" name="Group 14"/>
           <p:cNvGrpSpPr/>
           <p:nvPr/>
         </p:nvGrpSpPr>
         <p:grpSpPr>
-          <a:xfrm rot="0">
+          <a:xfrm>
             <a:off x="6461065" y="3918937"/>
             <a:ext cx="5213480" cy="2339645"/>
             <a:chOff x="0" y="0"/>
@@ -4491,12 +4535,12 @@
         </p:grpSpPr>
         <p:sp>
           <p:nvSpPr>
-            <p:cNvPr name="Freeform 15" id="15"/>
+            <p:cNvPr id="15" name="Freeform 15"/>
             <p:cNvSpPr/>
             <p:nvPr/>
           </p:nvSpPr>
           <p:spPr>
-            <a:xfrm flipH="false" flipV="false" rot="0">
+            <a:xfrm>
               <a:off x="0" y="0"/>
               <a:ext cx="5213478" cy="2339593"/>
             </a:xfrm>
@@ -4505,9 +4549,9 @@
               <a:gdLst/>
               <a:ahLst/>
               <a:cxnLst/>
-              <a:rect r="r" b="b" t="t" l="l"/>
+              <a:rect l="l" t="t" r="r" b="b"/>
               <a:pathLst>
-                <a:path h="2339593" w="5213478">
+                <a:path w="5213478" h="2339593">
                   <a:moveTo>
                     <a:pt x="0" y="2339593"/>
                   </a:moveTo>
@@ -4534,12 +4578,12 @@
       </p:grpSp>
       <p:grpSp>
         <p:nvGrpSpPr>
-          <p:cNvPr name="Group 16" id="16"/>
+          <p:cNvPr id="16" name="Group 16"/>
           <p:cNvGrpSpPr/>
           <p:nvPr/>
         </p:nvGrpSpPr>
         <p:grpSpPr>
-          <a:xfrm rot="0">
+          <a:xfrm>
             <a:off x="6461065" y="6687217"/>
             <a:ext cx="5213480" cy="2304860"/>
             <a:chOff x="0" y="0"/>
@@ -4548,12 +4592,12 @@
         </p:grpSpPr>
         <p:sp>
           <p:nvSpPr>
-            <p:cNvPr name="Freeform 17" id="17"/>
+            <p:cNvPr id="17" name="Freeform 17"/>
             <p:cNvSpPr/>
             <p:nvPr/>
           </p:nvSpPr>
           <p:spPr>
-            <a:xfrm flipH="false" flipV="false" rot="0">
+            <a:xfrm>
               <a:off x="0" y="0"/>
               <a:ext cx="5213478" cy="2304919"/>
             </a:xfrm>
@@ -4562,9 +4606,9 @@
               <a:gdLst/>
               <a:ahLst/>
               <a:cxnLst/>
-              <a:rect r="r" b="b" t="t" l="l"/>
+              <a:rect l="l" t="t" r="r" b="b"/>
               <a:pathLst>
-                <a:path h="2304919" w="5213478">
+                <a:path w="5213478" h="2304919">
                   <a:moveTo>
                     <a:pt x="0" y="2304919"/>
                   </a:moveTo>
@@ -4591,12 +4635,12 @@
       </p:grpSp>
       <p:sp>
         <p:nvSpPr>
-          <p:cNvPr name="TextBox 18" id="18"/>
-          <p:cNvSpPr txBox="true"/>
+          <p:cNvPr id="18" name="TextBox 18"/>
+          <p:cNvSpPr txBox="1"/>
           <p:nvPr/>
         </p:nvSpPr>
         <p:spPr>
-          <a:xfrm rot="0">
+          <a:xfrm>
             <a:off x="1028700" y="1207494"/>
             <a:ext cx="6884451" cy="2194922"/>
           </a:xfrm>
@@ -4605,7 +4649,7 @@
           </a:prstGeom>
         </p:spPr>
         <p:txBody>
-          <a:bodyPr anchor="t" rtlCol="false" tIns="0" lIns="0" bIns="0" rIns="0">
+          <a:bodyPr lIns="0" tIns="0" rIns="0" bIns="0" rtlCol="0" anchor="t">
             <a:spAutoFit/>
           </a:bodyPr>
           <a:lstStyle/>
@@ -4616,7 +4660,7 @@
               </a:lnSpc>
             </a:pPr>
             <a:r>
-              <a:rPr lang="en-US" b="true" sz="8493">
+              <a:rPr lang="en-US" sz="8493" b="1">
                 <a:solidFill>
                   <a:srgbClr val="F7F9FC"/>
                 </a:solidFill>
@@ -4632,12 +4676,12 @@
       </p:sp>
       <p:sp>
         <p:nvSpPr>
-          <p:cNvPr name="TextBox 19" id="19"/>
-          <p:cNvSpPr txBox="true"/>
+          <p:cNvPr id="19" name="TextBox 19"/>
+          <p:cNvSpPr txBox="1"/>
           <p:nvPr/>
         </p:nvSpPr>
         <p:spPr>
-          <a:xfrm rot="0">
+          <a:xfrm>
             <a:off x="2996308" y="4408894"/>
             <a:ext cx="66399" cy="348958"/>
           </a:xfrm>
@@ -4646,7 +4690,7 @@
           </a:prstGeom>
         </p:spPr>
         <p:txBody>
-          <a:bodyPr anchor="t" rtlCol="false" tIns="0" lIns="0" bIns="0" rIns="0">
+          <a:bodyPr lIns="0" tIns="0" rIns="0" bIns="0" rtlCol="0" anchor="t">
             <a:spAutoFit/>
           </a:bodyPr>
           <a:lstStyle/>
@@ -4657,7 +4701,7 @@
               </a:lnSpc>
             </a:pPr>
             <a:r>
-              <a:rPr lang="en-US" b="true" sz="1973">
+              <a:rPr lang="en-US" sz="1973" b="1">
                 <a:solidFill>
                   <a:srgbClr val="F7F9FC"/>
                 </a:solidFill>
@@ -4673,12 +4717,12 @@
       </p:sp>
       <p:sp>
         <p:nvSpPr>
-          <p:cNvPr name="TextBox 20" id="20"/>
-          <p:cNvSpPr txBox="true"/>
+          <p:cNvPr id="20" name="TextBox 20"/>
+          <p:cNvSpPr txBox="1"/>
           <p:nvPr/>
         </p:nvSpPr>
         <p:spPr>
-          <a:xfrm rot="0">
+          <a:xfrm>
             <a:off x="1421149" y="4418419"/>
             <a:ext cx="4139641" cy="1460459"/>
           </a:xfrm>
@@ -4687,7 +4731,7 @@
           </a:prstGeom>
         </p:spPr>
         <p:txBody>
-          <a:bodyPr anchor="t" rtlCol="false" tIns="0" lIns="0" bIns="0" rIns="0">
+          <a:bodyPr lIns="0" tIns="0" rIns="0" bIns="0" rtlCol="0" anchor="t">
             <a:spAutoFit/>
           </a:bodyPr>
           <a:lstStyle/>
@@ -4698,7 +4742,7 @@
               </a:lnSpc>
             </a:pPr>
             <a:r>
-              <a:rPr lang="en-US" b="true" sz="1973">
+              <a:rPr lang="en-US" sz="1973" b="1">
                 <a:solidFill>
                   <a:srgbClr val="F7F9FC"/>
                 </a:solidFill>
@@ -4733,12 +4777,12 @@
       </p:sp>
       <p:sp>
         <p:nvSpPr>
-          <p:cNvPr name="TextBox 21" id="21"/>
-          <p:cNvSpPr txBox="true"/>
+          <p:cNvPr id="21" name="TextBox 21"/>
+          <p:cNvSpPr txBox="1"/>
           <p:nvPr/>
         </p:nvSpPr>
         <p:spPr>
-          <a:xfrm rot="0">
+          <a:xfrm>
             <a:off x="1493530" y="7186689"/>
             <a:ext cx="3814972" cy="1463497"/>
           </a:xfrm>
@@ -4747,7 +4791,7 @@
           </a:prstGeom>
         </p:spPr>
         <p:txBody>
-          <a:bodyPr anchor="t" rtlCol="false" tIns="0" lIns="0" bIns="0" rIns="0">
+          <a:bodyPr lIns="0" tIns="0" rIns="0" bIns="0" rtlCol="0" anchor="t">
             <a:spAutoFit/>
           </a:bodyPr>
           <a:lstStyle/>
@@ -4758,7 +4802,7 @@
               </a:lnSpc>
             </a:pPr>
             <a:r>
-              <a:rPr lang="en-US" b="true" sz="1973">
+              <a:rPr lang="en-US" sz="1973" b="1">
                 <a:solidFill>
                   <a:srgbClr val="F7F9FC"/>
                 </a:solidFill>
@@ -4793,12 +4837,12 @@
       </p:sp>
       <p:sp>
         <p:nvSpPr>
-          <p:cNvPr name="TextBox 22" id="22"/>
-          <p:cNvSpPr txBox="true"/>
+          <p:cNvPr id="22" name="TextBox 22"/>
+          <p:cNvSpPr txBox="1"/>
           <p:nvPr/>
         </p:nvSpPr>
         <p:spPr>
-          <a:xfrm rot="0">
+          <a:xfrm>
             <a:off x="2249262" y="7177164"/>
             <a:ext cx="2491435" cy="348958"/>
           </a:xfrm>
@@ -4807,7 +4851,7 @@
           </a:prstGeom>
         </p:spPr>
         <p:txBody>
-          <a:bodyPr anchor="t" rtlCol="false" tIns="0" lIns="0" bIns="0" rIns="0">
+          <a:bodyPr lIns="0" tIns="0" rIns="0" bIns="0" rtlCol="0" anchor="t">
             <a:spAutoFit/>
           </a:bodyPr>
           <a:lstStyle/>
@@ -4818,7 +4862,7 @@
               </a:lnSpc>
             </a:pPr>
             <a:r>
-              <a:rPr lang="en-US" b="true" sz="1973">
+              <a:rPr lang="en-US" sz="1973" b="1">
                 <a:solidFill>
                   <a:srgbClr val="F7F9FC"/>
                 </a:solidFill>
@@ -4834,12 +4878,12 @@
       </p:sp>
       <p:sp>
         <p:nvSpPr>
-          <p:cNvPr name="TextBox 23" id="23"/>
-          <p:cNvSpPr txBox="true"/>
+          <p:cNvPr id="23" name="TextBox 23"/>
+          <p:cNvSpPr txBox="1"/>
           <p:nvPr/>
         </p:nvSpPr>
         <p:spPr>
-          <a:xfrm rot="0">
+          <a:xfrm>
             <a:off x="2176882" y="4408894"/>
             <a:ext cx="2687545" cy="348958"/>
           </a:xfrm>
@@ -4848,7 +4892,7 @@
           </a:prstGeom>
         </p:spPr>
         <p:txBody>
-          <a:bodyPr anchor="t" rtlCol="false" tIns="0" lIns="0" bIns="0" rIns="0">
+          <a:bodyPr lIns="0" tIns="0" rIns="0" bIns="0" rtlCol="0" anchor="t">
             <a:spAutoFit/>
           </a:bodyPr>
           <a:lstStyle/>
@@ -4859,7 +4903,7 @@
               </a:lnSpc>
             </a:pPr>
             <a:r>
-              <a:rPr lang="en-US" b="true" sz="1973">
+              <a:rPr lang="en-US" sz="1973" b="1">
                 <a:solidFill>
                   <a:srgbClr val="F7F9FC"/>
                 </a:solidFill>
@@ -4871,7 +4915,7 @@
               <a:t>Define</a:t>
             </a:r>
             <a:r>
-              <a:rPr lang="en-US" b="true" sz="1973">
+              <a:rPr lang="en-US" sz="1973" b="1">
                 <a:solidFill>
                   <a:srgbClr val="000000"/>
                 </a:solidFill>
@@ -4883,7 +4927,7 @@
               <a:t> </a:t>
             </a:r>
             <a:r>
-              <a:rPr lang="en-US" b="true" sz="1973">
+              <a:rPr lang="en-US" sz="1973" b="1">
                 <a:solidFill>
                   <a:srgbClr val="F7F9FC"/>
                 </a:solidFill>
@@ -4895,7 +4939,7 @@
               <a:t>Your</a:t>
             </a:r>
             <a:r>
-              <a:rPr lang="en-US" b="true" sz="1973">
+              <a:rPr lang="en-US" sz="1973" b="1">
                 <a:solidFill>
                   <a:srgbClr val="000000"/>
                 </a:solidFill>
@@ -4907,7 +4951,7 @@
               <a:t> </a:t>
             </a:r>
             <a:r>
-              <a:rPr lang="en-US" b="true" sz="1973">
+              <a:rPr lang="en-US" sz="1973" b="1">
                 <a:solidFill>
                   <a:srgbClr val="F7F9FC"/>
                 </a:solidFill>
@@ -4923,12 +4967,12 @@
       </p:sp>
       <p:sp>
         <p:nvSpPr>
-          <p:cNvPr name="TextBox 24" id="24"/>
-          <p:cNvSpPr txBox="true"/>
+          <p:cNvPr id="24" name="TextBox 24"/>
+          <p:cNvSpPr txBox="1"/>
           <p:nvPr/>
         </p:nvSpPr>
         <p:spPr>
-          <a:xfrm rot="0">
+          <a:xfrm>
             <a:off x="6889699" y="4408894"/>
             <a:ext cx="397754" cy="348958"/>
           </a:xfrm>
@@ -4937,7 +4981,7 @@
           </a:prstGeom>
         </p:spPr>
         <p:txBody>
-          <a:bodyPr anchor="t" rtlCol="false" tIns="0" lIns="0" bIns="0" rIns="0">
+          <a:bodyPr lIns="0" tIns="0" rIns="0" bIns="0" rtlCol="0" anchor="t">
             <a:spAutoFit/>
           </a:bodyPr>
           <a:lstStyle/>
@@ -4948,7 +4992,7 @@
               </a:lnSpc>
             </a:pPr>
             <a:r>
-              <a:rPr lang="en-US" b="true" sz="1973">
+              <a:rPr lang="en-US" sz="1973" b="1">
                 <a:solidFill>
                   <a:srgbClr val="F7F9FC"/>
                 </a:solidFill>
@@ -4964,12 +5008,12 @@
       </p:sp>
       <p:sp>
         <p:nvSpPr>
-          <p:cNvPr name="TextBox 25" id="25"/>
-          <p:cNvSpPr txBox="true"/>
+          <p:cNvPr id="25" name="TextBox 25"/>
+          <p:cNvSpPr txBox="1"/>
           <p:nvPr/>
         </p:nvSpPr>
         <p:spPr>
-          <a:xfrm rot="0">
+          <a:xfrm>
             <a:off x="6962080" y="7177164"/>
             <a:ext cx="397754" cy="348958"/>
           </a:xfrm>
@@ -4978,7 +5022,7 @@
           </a:prstGeom>
         </p:spPr>
         <p:txBody>
-          <a:bodyPr anchor="t" rtlCol="false" tIns="0" lIns="0" bIns="0" rIns="0">
+          <a:bodyPr lIns="0" tIns="0" rIns="0" bIns="0" rtlCol="0" anchor="t">
             <a:spAutoFit/>
           </a:bodyPr>
           <a:lstStyle/>
@@ -4989,7 +5033,7 @@
               </a:lnSpc>
             </a:pPr>
             <a:r>
-              <a:rPr lang="en-US" b="true" sz="1973">
+              <a:rPr lang="en-US" sz="1973" b="1">
                 <a:solidFill>
                   <a:srgbClr val="F7F9FC"/>
                 </a:solidFill>
@@ -5005,12 +5049,12 @@
       </p:sp>
       <p:sp>
         <p:nvSpPr>
-          <p:cNvPr name="TextBox 26" id="26"/>
-          <p:cNvSpPr txBox="true"/>
+          <p:cNvPr id="26" name="TextBox 26"/>
+          <p:cNvSpPr txBox="1"/>
           <p:nvPr/>
         </p:nvSpPr>
         <p:spPr>
-          <a:xfrm rot="0">
+          <a:xfrm>
             <a:off x="7717812" y="7177164"/>
             <a:ext cx="2021643" cy="348958"/>
           </a:xfrm>
@@ -5019,7 +5063,7 @@
           </a:prstGeom>
         </p:spPr>
         <p:txBody>
-          <a:bodyPr anchor="t" rtlCol="false" tIns="0" lIns="0" bIns="0" rIns="0">
+          <a:bodyPr lIns="0" tIns="0" rIns="0" bIns="0" rtlCol="0" anchor="t">
             <a:spAutoFit/>
           </a:bodyPr>
           <a:lstStyle/>
@@ -5030,7 +5074,7 @@
               </a:lnSpc>
             </a:pPr>
             <a:r>
-              <a:rPr lang="en-US" b="true" sz="1973">
+              <a:rPr lang="en-US" sz="1973" b="1">
                 <a:solidFill>
                   <a:srgbClr val="F7F9FC"/>
                 </a:solidFill>
@@ -5046,12 +5090,12 @@
       </p:sp>
       <p:sp>
         <p:nvSpPr>
-          <p:cNvPr name="TextBox 27" id="27"/>
-          <p:cNvSpPr txBox="true"/>
+          <p:cNvPr id="27" name="TextBox 27"/>
+          <p:cNvSpPr txBox="1"/>
           <p:nvPr/>
         </p:nvSpPr>
         <p:spPr>
-          <a:xfrm rot="0">
+          <a:xfrm>
             <a:off x="7645432" y="4408894"/>
             <a:ext cx="2243833" cy="348958"/>
           </a:xfrm>
@@ -5060,7 +5104,7 @@
           </a:prstGeom>
         </p:spPr>
         <p:txBody>
-          <a:bodyPr anchor="t" rtlCol="false" tIns="0" lIns="0" bIns="0" rIns="0">
+          <a:bodyPr lIns="0" tIns="0" rIns="0" bIns="0" rtlCol="0" anchor="t">
             <a:spAutoFit/>
           </a:bodyPr>
           <a:lstStyle/>
@@ -5071,7 +5115,7 @@
               </a:lnSpc>
             </a:pPr>
             <a:r>
-              <a:rPr lang="en-US" b="true" sz="1973">
+              <a:rPr lang="en-US" sz="1973" b="1">
                 <a:solidFill>
                   <a:srgbClr val="F7F9FC"/>
                 </a:solidFill>
@@ -5083,7 +5127,7 @@
               <a:t>Pin</a:t>
             </a:r>
             <a:r>
-              <a:rPr lang="en-US" b="true" sz="1973">
+              <a:rPr lang="en-US" sz="1973" b="1">
                 <a:solidFill>
                   <a:srgbClr val="000000"/>
                 </a:solidFill>
@@ -5095,7 +5139,7 @@
               <a:t> </a:t>
             </a:r>
             <a:r>
-              <a:rPr lang="en-US" b="true" sz="1973">
+              <a:rPr lang="en-US" sz="1973" b="1">
                 <a:solidFill>
                   <a:srgbClr val="F7F9FC"/>
                 </a:solidFill>
@@ -5107,7 +5151,7 @@
               <a:t>Your</a:t>
             </a:r>
             <a:r>
-              <a:rPr lang="en-US" b="true" sz="1973">
+              <a:rPr lang="en-US" sz="1973" b="1">
                 <a:solidFill>
                   <a:srgbClr val="000000"/>
                 </a:solidFill>
@@ -5119,7 +5163,7 @@
               <a:t> </a:t>
             </a:r>
             <a:r>
-              <a:rPr lang="en-US" b="true" sz="1973">
+              <a:rPr lang="en-US" sz="1973" b="1">
                 <a:solidFill>
                   <a:srgbClr val="F7F9FC"/>
                 </a:solidFill>
@@ -5135,12 +5179,12 @@
       </p:sp>
       <p:sp>
         <p:nvSpPr>
-          <p:cNvPr name="TextBox 28" id="28"/>
-          <p:cNvSpPr txBox="true"/>
+          <p:cNvPr id="28" name="TextBox 28"/>
+          <p:cNvSpPr txBox="1"/>
           <p:nvPr/>
         </p:nvSpPr>
         <p:spPr>
-          <a:xfrm rot="0">
+          <a:xfrm>
             <a:off x="6889699" y="4871847"/>
             <a:ext cx="4032437" cy="1007440"/>
           </a:xfrm>
@@ -5149,7 +5193,7 @@
           </a:prstGeom>
         </p:spPr>
         <p:txBody>
-          <a:bodyPr anchor="t" rtlCol="false" tIns="0" lIns="0" bIns="0" rIns="0">
+          <a:bodyPr lIns="0" tIns="0" rIns="0" bIns="0" rtlCol="0" anchor="t">
             <a:spAutoFit/>
           </a:bodyPr>
           <a:lstStyle/>
@@ -5176,12 +5220,12 @@
       </p:sp>
       <p:sp>
         <p:nvSpPr>
-          <p:cNvPr name="TextBox 29" id="29"/>
-          <p:cNvSpPr txBox="true"/>
+          <p:cNvPr id="29" name="TextBox 29"/>
+          <p:cNvSpPr txBox="1"/>
           <p:nvPr/>
         </p:nvSpPr>
         <p:spPr>
-          <a:xfrm rot="0">
+          <a:xfrm>
             <a:off x="6962080" y="7643155"/>
             <a:ext cx="4298499" cy="1007440"/>
           </a:xfrm>
@@ -5190,7 +5234,7 @@
           </a:prstGeom>
         </p:spPr>
         <p:txBody>
-          <a:bodyPr anchor="t" rtlCol="false" tIns="0" lIns="0" bIns="0" rIns="0">
+          <a:bodyPr lIns="0" tIns="0" rIns="0" bIns="0" rtlCol="0" anchor="t">
             <a:spAutoFit/>
           </a:bodyPr>
           <a:lstStyle/>
@@ -5224,13 +5268,14 @@
 </file>
 
 <file path=ppt/slides/slide4.xml><?xml version="1.0" encoding="utf-8"?>
-<p:sld xmlns:p="http://schemas.openxmlformats.org/presentationml/2006/main" xmlns:a="http://schemas.openxmlformats.org/drawingml/2006/main" xmlns:r="http://schemas.openxmlformats.org/officeDocument/2006/relationships">
+<p:sld xmlns:a="http://schemas.openxmlformats.org/drawingml/2006/main" xmlns:r="http://schemas.openxmlformats.org/officeDocument/2006/relationships" xmlns:p="http://schemas.openxmlformats.org/presentationml/2006/main">
   <p:cSld>
     <p:bg>
       <p:bgPr>
         <a:solidFill>
           <a:srgbClr val="172B4D"/>
         </a:solidFill>
+        <a:effectLst/>
       </p:bgPr>
     </p:bg>
     <p:spTree>
@@ -5249,12 +5294,12 @@
       </p:grpSpPr>
       <p:sp>
         <p:nvSpPr>
-          <p:cNvPr name="Freeform 2" id="2"/>
+          <p:cNvPr id="2" name="Freeform 2"/>
           <p:cNvSpPr/>
           <p:nvPr/>
         </p:nvSpPr>
         <p:spPr>
-          <a:xfrm flipH="false" flipV="false" rot="0">
+          <a:xfrm>
             <a:off x="1332309" y="5905500"/>
             <a:ext cx="5972175" cy="3352800"/>
           </a:xfrm>
@@ -5263,9 +5308,9 @@
             <a:gdLst/>
             <a:ahLst/>
             <a:cxnLst/>
-            <a:rect r="r" b="b" t="t" l="l"/>
+            <a:rect l="l" t="t" r="r" b="b"/>
             <a:pathLst>
-              <a:path h="3352800" w="5972175">
+              <a:path w="5972175" h="3352800">
                 <a:moveTo>
                   <a:pt x="0" y="0"/>
                 </a:moveTo>
@@ -5286,27 +5331,27 @@
             </a:pathLst>
           </a:custGeom>
           <a:blipFill>
-            <a:blip r:embed="rId2">
+            <a:blip>
               <a:extLst>
                 <a:ext uri="{96DAC541-7B7A-43D3-8B79-37D633B846F1}">
-                  <asvg:svgBlip xmlns:asvg="http://schemas.microsoft.com/office/drawing/2016/SVG/main" r:embed="rId3"/>
+                  <asvg:svgBlip xmlns:asvg="http://schemas.microsoft.com/office/drawing/2016/SVG/main" r:embed="rId2"/>
                 </a:ext>
               </a:extLst>
             </a:blip>
             <a:stretch>
-              <a:fillRect l="0" t="0" r="0" b="0"/>
+              <a:fillRect/>
             </a:stretch>
           </a:blipFill>
         </p:spPr>
       </p:sp>
       <p:sp>
         <p:nvSpPr>
-          <p:cNvPr name="Freeform 3" id="3"/>
+          <p:cNvPr id="3" name="Freeform 3"/>
           <p:cNvSpPr/>
           <p:nvPr/>
         </p:nvSpPr>
         <p:spPr>
-          <a:xfrm flipH="false" flipV="false" rot="0">
+          <a:xfrm>
             <a:off x="1332309" y="2110816"/>
             <a:ext cx="5970594" cy="3032684"/>
           </a:xfrm>
@@ -5315,9 +5360,9 @@
             <a:gdLst/>
             <a:ahLst/>
             <a:cxnLst/>
-            <a:rect r="r" b="b" t="t" l="l"/>
+            <a:rect l="l" t="t" r="r" b="b"/>
             <a:pathLst>
-              <a:path h="3032684" w="5970594">
+              <a:path w="5970594" h="3032684">
                 <a:moveTo>
                   <a:pt x="0" y="0"/>
                 </a:moveTo>
@@ -5338,27 +5383,27 @@
             </a:pathLst>
           </a:custGeom>
           <a:blipFill>
-            <a:blip r:embed="rId4">
+            <a:blip>
               <a:extLst>
                 <a:ext uri="{96DAC541-7B7A-43D3-8B79-37D633B846F1}">
-                  <asvg:svgBlip xmlns:asvg="http://schemas.microsoft.com/office/drawing/2016/SVG/main" r:embed="rId5"/>
+                  <asvg:svgBlip xmlns:asvg="http://schemas.microsoft.com/office/drawing/2016/SVG/main" r:embed="rId3"/>
                 </a:ext>
               </a:extLst>
             </a:blip>
             <a:stretch>
-              <a:fillRect l="0" t="0" r="0" b="0"/>
+              <a:fillRect/>
             </a:stretch>
           </a:blipFill>
         </p:spPr>
       </p:sp>
       <p:grpSp>
         <p:nvGrpSpPr>
-          <p:cNvPr name="Group 4" id="4"/>
+          <p:cNvPr id="4" name="Group 4"/>
           <p:cNvGrpSpPr/>
           <p:nvPr/>
         </p:nvGrpSpPr>
         <p:grpSpPr>
-          <a:xfrm rot="0">
+          <a:xfrm>
             <a:off x="1743856" y="3252940"/>
             <a:ext cx="288798" cy="288798"/>
             <a:chOff x="0" y="0"/>
@@ -5367,12 +5412,12 @@
         </p:grpSpPr>
         <p:sp>
           <p:nvSpPr>
-            <p:cNvPr name="Freeform 5" id="5"/>
+            <p:cNvPr id="5" name="Freeform 5"/>
             <p:cNvSpPr/>
             <p:nvPr/>
           </p:nvSpPr>
           <p:spPr>
-            <a:xfrm flipH="false" flipV="false" rot="0">
+            <a:xfrm>
               <a:off x="0" y="0"/>
               <a:ext cx="385064" cy="384937"/>
             </a:xfrm>
@@ -5381,9 +5426,9 @@
               <a:gdLst/>
               <a:ahLst/>
               <a:cxnLst/>
-              <a:rect r="r" b="b" t="t" l="l"/>
+              <a:rect l="l" t="t" r="r" b="b"/>
               <a:pathLst>
-                <a:path h="384937" w="385064">
+                <a:path w="385064" h="384937">
                   <a:moveTo>
                     <a:pt x="191897" y="0"/>
                   </a:moveTo>
@@ -5415,9 +5460,9 @@
               </a:pathLst>
             </a:custGeom>
             <a:blipFill>
-              <a:blip r:embed="rId6"/>
+              <a:blip r:embed="rId4"/>
               <a:stretch>
-                <a:fillRect l="0" t="0" r="0" b="-32"/>
+                <a:fillRect b="-32"/>
               </a:stretch>
             </a:blipFill>
           </p:spPr>
@@ -5425,12 +5470,12 @@
       </p:grpSp>
       <p:grpSp>
         <p:nvGrpSpPr>
-          <p:cNvPr name="Group 6" id="6"/>
+          <p:cNvPr id="6" name="Group 6"/>
           <p:cNvGrpSpPr/>
           <p:nvPr/>
         </p:nvGrpSpPr>
         <p:grpSpPr>
-          <a:xfrm rot="0">
+          <a:xfrm>
             <a:off x="1658903" y="7235295"/>
             <a:ext cx="288798" cy="288798"/>
             <a:chOff x="0" y="0"/>
@@ -5439,12 +5484,12 @@
         </p:grpSpPr>
         <p:sp>
           <p:nvSpPr>
-            <p:cNvPr name="Freeform 7" id="7"/>
+            <p:cNvPr id="7" name="Freeform 7"/>
             <p:cNvSpPr/>
             <p:nvPr/>
           </p:nvSpPr>
           <p:spPr>
-            <a:xfrm flipH="false" flipV="false" rot="0">
+            <a:xfrm>
               <a:off x="0" y="0"/>
               <a:ext cx="384937" cy="385064"/>
             </a:xfrm>
@@ -5453,9 +5498,9 @@
               <a:gdLst/>
               <a:ahLst/>
               <a:cxnLst/>
-              <a:rect r="r" b="b" t="t" l="l"/>
+              <a:rect l="l" t="t" r="r" b="b"/>
               <a:pathLst>
-                <a:path h="385064" w="384937">
+                <a:path w="384937" h="385064">
                   <a:moveTo>
                     <a:pt x="192532" y="0"/>
                   </a:moveTo>
@@ -5487,9 +5532,9 @@
               </a:pathLst>
             </a:custGeom>
             <a:blipFill>
-              <a:blip r:embed="rId6"/>
+              <a:blip r:embed="rId4"/>
               <a:stretch>
-                <a:fillRect l="0" t="0" r="-32" b="0"/>
+                <a:fillRect r="-32"/>
               </a:stretch>
             </a:blipFill>
           </p:spPr>
@@ -5497,12 +5542,12 @@
       </p:grpSp>
       <p:grpSp>
         <p:nvGrpSpPr>
-          <p:cNvPr name="Group 8" id="8"/>
+          <p:cNvPr id="8" name="Group 8"/>
           <p:cNvGrpSpPr/>
           <p:nvPr/>
         </p:nvGrpSpPr>
         <p:grpSpPr>
-          <a:xfrm rot="0">
+          <a:xfrm>
             <a:off x="1743856" y="3792960"/>
             <a:ext cx="288798" cy="288798"/>
             <a:chOff x="0" y="0"/>
@@ -5511,12 +5556,12 @@
         </p:grpSpPr>
         <p:sp>
           <p:nvSpPr>
-            <p:cNvPr name="Freeform 9" id="9"/>
+            <p:cNvPr id="9" name="Freeform 9"/>
             <p:cNvSpPr/>
             <p:nvPr/>
           </p:nvSpPr>
           <p:spPr>
-            <a:xfrm flipH="false" flipV="false" rot="0">
+            <a:xfrm>
               <a:off x="0" y="0"/>
               <a:ext cx="385064" cy="384937"/>
             </a:xfrm>
@@ -5525,9 +5570,9 @@
               <a:gdLst/>
               <a:ahLst/>
               <a:cxnLst/>
-              <a:rect r="r" b="b" t="t" l="l"/>
+              <a:rect l="l" t="t" r="r" b="b"/>
               <a:pathLst>
-                <a:path h="384937" w="385064">
+                <a:path w="385064" h="384937">
                   <a:moveTo>
                     <a:pt x="192532" y="0"/>
                   </a:moveTo>
@@ -5559,9 +5604,9 @@
               </a:pathLst>
             </a:custGeom>
             <a:blipFill>
-              <a:blip r:embed="rId6"/>
+              <a:blip r:embed="rId4"/>
               <a:stretch>
-                <a:fillRect l="0" t="0" r="0" b="-32"/>
+                <a:fillRect b="-32"/>
               </a:stretch>
             </a:blipFill>
           </p:spPr>
@@ -5569,12 +5614,12 @@
       </p:grpSp>
       <p:grpSp>
         <p:nvGrpSpPr>
-          <p:cNvPr name="Group 10" id="10"/>
+          <p:cNvPr id="10" name="Group 10"/>
           <p:cNvGrpSpPr/>
           <p:nvPr/>
         </p:nvGrpSpPr>
         <p:grpSpPr>
-          <a:xfrm rot="0">
+          <a:xfrm>
             <a:off x="1658903" y="7823787"/>
             <a:ext cx="288798" cy="288798"/>
             <a:chOff x="0" y="0"/>
@@ -5583,12 +5628,12 @@
         </p:grpSpPr>
         <p:sp>
           <p:nvSpPr>
-            <p:cNvPr name="Freeform 11" id="11"/>
+            <p:cNvPr id="11" name="Freeform 11"/>
             <p:cNvSpPr/>
             <p:nvPr/>
           </p:nvSpPr>
           <p:spPr>
-            <a:xfrm flipH="false" flipV="false" rot="0">
+            <a:xfrm>
               <a:off x="0" y="0"/>
               <a:ext cx="384937" cy="385064"/>
             </a:xfrm>
@@ -5597,9 +5642,9 @@
               <a:gdLst/>
               <a:ahLst/>
               <a:cxnLst/>
-              <a:rect r="r" b="b" t="t" l="l"/>
+              <a:rect l="l" t="t" r="r" b="b"/>
               <a:pathLst>
-                <a:path h="385064" w="384937">
+                <a:path w="384937" h="385064">
                   <a:moveTo>
                     <a:pt x="192532" y="0"/>
                   </a:moveTo>
@@ -5631,9 +5676,9 @@
               </a:pathLst>
             </a:custGeom>
             <a:blipFill>
-              <a:blip r:embed="rId6"/>
+              <a:blip r:embed="rId4"/>
               <a:stretch>
-                <a:fillRect l="0" t="0" r="-32" b="0"/>
+                <a:fillRect r="-32"/>
               </a:stretch>
             </a:blipFill>
           </p:spPr>
@@ -5641,12 +5686,12 @@
       </p:grpSp>
       <p:grpSp>
         <p:nvGrpSpPr>
-          <p:cNvPr name="Group 12" id="12"/>
+          <p:cNvPr id="12" name="Group 12"/>
           <p:cNvGrpSpPr/>
           <p:nvPr/>
         </p:nvGrpSpPr>
         <p:grpSpPr>
-          <a:xfrm rot="0">
+          <a:xfrm>
             <a:off x="1743856" y="4299995"/>
             <a:ext cx="288798" cy="288798"/>
             <a:chOff x="0" y="0"/>
@@ -5655,12 +5700,12 @@
         </p:grpSpPr>
         <p:sp>
           <p:nvSpPr>
-            <p:cNvPr name="Freeform 13" id="13"/>
+            <p:cNvPr id="13" name="Freeform 13"/>
             <p:cNvSpPr/>
             <p:nvPr/>
           </p:nvSpPr>
           <p:spPr>
-            <a:xfrm flipH="false" flipV="false" rot="0">
+            <a:xfrm>
               <a:off x="0" y="0"/>
               <a:ext cx="385064" cy="384937"/>
             </a:xfrm>
@@ -5669,9 +5714,9 @@
               <a:gdLst/>
               <a:ahLst/>
               <a:cxnLst/>
-              <a:rect r="r" b="b" t="t" l="l"/>
+              <a:rect l="l" t="t" r="r" b="b"/>
               <a:pathLst>
-                <a:path h="384937" w="385064">
+                <a:path w="385064" h="384937">
                   <a:moveTo>
                     <a:pt x="192151" y="0"/>
                   </a:moveTo>
@@ -5703,9 +5748,9 @@
               </a:pathLst>
             </a:custGeom>
             <a:blipFill>
-              <a:blip r:embed="rId6"/>
+              <a:blip r:embed="rId4"/>
               <a:stretch>
-                <a:fillRect l="0" t="0" r="0" b="-32"/>
+                <a:fillRect b="-32"/>
               </a:stretch>
             </a:blipFill>
           </p:spPr>
@@ -5713,12 +5758,12 @@
       </p:grpSp>
       <p:grpSp>
         <p:nvGrpSpPr>
-          <p:cNvPr name="Group 14" id="14"/>
+          <p:cNvPr id="14" name="Group 14"/>
           <p:cNvGrpSpPr/>
           <p:nvPr/>
         </p:nvGrpSpPr>
         <p:grpSpPr>
-          <a:xfrm rot="0">
+          <a:xfrm>
             <a:off x="1658903" y="8407946"/>
             <a:ext cx="288798" cy="288798"/>
             <a:chOff x="0" y="0"/>
@@ -5727,12 +5772,12 @@
         </p:grpSpPr>
         <p:sp>
           <p:nvSpPr>
-            <p:cNvPr name="Freeform 15" id="15"/>
+            <p:cNvPr id="15" name="Freeform 15"/>
             <p:cNvSpPr/>
             <p:nvPr/>
           </p:nvSpPr>
           <p:spPr>
-            <a:xfrm flipH="false" flipV="false" rot="0">
+            <a:xfrm>
               <a:off x="0" y="0"/>
               <a:ext cx="385064" cy="385064"/>
             </a:xfrm>
@@ -5741,9 +5786,9 @@
               <a:gdLst/>
               <a:ahLst/>
               <a:cxnLst/>
-              <a:rect r="r" b="b" t="t" l="l"/>
+              <a:rect l="l" t="t" r="r" b="b"/>
               <a:pathLst>
-                <a:path h="385064" w="385064">
+                <a:path w="385064" h="385064">
                   <a:moveTo>
                     <a:pt x="192532" y="0"/>
                   </a:moveTo>
@@ -5772,9 +5817,9 @@
               </a:pathLst>
             </a:custGeom>
             <a:blipFill>
-              <a:blip r:embed="rId6"/>
+              <a:blip r:embed="rId4"/>
               <a:stretch>
-                <a:fillRect l="0" t="0" r="0" b="0"/>
+                <a:fillRect/>
               </a:stretch>
             </a:blipFill>
           </p:spPr>
@@ -5782,12 +5827,12 @@
       </p:grpSp>
       <p:grpSp>
         <p:nvGrpSpPr>
-          <p:cNvPr name="Group 16" id="16"/>
+          <p:cNvPr id="16" name="Group 16"/>
           <p:cNvGrpSpPr/>
           <p:nvPr/>
         </p:nvGrpSpPr>
         <p:grpSpPr>
-          <a:xfrm rot="0">
+          <a:xfrm>
             <a:off x="9144000" y="5262667"/>
             <a:ext cx="9144000" cy="5024333"/>
             <a:chOff x="0" y="0"/>
@@ -5796,12 +5841,12 @@
         </p:grpSpPr>
         <p:sp>
           <p:nvSpPr>
-            <p:cNvPr name="Freeform 17" id="17"/>
+            <p:cNvPr id="17" name="Freeform 17"/>
             <p:cNvSpPr/>
             <p:nvPr/>
           </p:nvSpPr>
           <p:spPr>
-            <a:xfrm flipH="false" flipV="false" rot="0">
+            <a:xfrm>
               <a:off x="0" y="0"/>
               <a:ext cx="12192000" cy="6699123"/>
             </a:xfrm>
@@ -5810,9 +5855,9 @@
               <a:gdLst/>
               <a:ahLst/>
               <a:cxnLst/>
-              <a:rect r="r" b="b" t="t" l="l"/>
+              <a:rect l="l" t="t" r="r" b="b"/>
               <a:pathLst>
-                <a:path h="6699123" w="12192000">
+                <a:path w="12192000" h="6699123">
                   <a:moveTo>
                     <a:pt x="6699123" y="0"/>
                   </a:moveTo>
@@ -5850,9 +5895,9 @@
               </a:pathLst>
             </a:custGeom>
             <a:blipFill>
-              <a:blip r:embed="rId7"/>
+              <a:blip r:embed="rId5"/>
               <a:stretch>
-                <a:fillRect l="0" t="0" r="-9893" b="0"/>
+                <a:fillRect r="-9893"/>
               </a:stretch>
             </a:blipFill>
           </p:spPr>
@@ -5860,12 +5905,12 @@
       </p:grpSp>
       <p:grpSp>
         <p:nvGrpSpPr>
-          <p:cNvPr name="Group 18" id="18"/>
+          <p:cNvPr id="18" name="Group 18"/>
           <p:cNvGrpSpPr/>
           <p:nvPr/>
         </p:nvGrpSpPr>
         <p:grpSpPr>
-          <a:xfrm rot="0">
+          <a:xfrm>
             <a:off x="8518760" y="4334218"/>
             <a:ext cx="8732558" cy="4924082"/>
             <a:chOff x="0" y="0"/>
@@ -5874,12 +5919,12 @@
         </p:grpSpPr>
         <p:sp>
           <p:nvSpPr>
-            <p:cNvPr name="Freeform 19" id="19"/>
+            <p:cNvPr id="19" name="Freeform 19"/>
             <p:cNvSpPr/>
             <p:nvPr/>
           </p:nvSpPr>
           <p:spPr>
-            <a:xfrm flipH="false" flipV="false" rot="0">
+            <a:xfrm>
               <a:off x="0" y="0"/>
               <a:ext cx="11643487" cy="6565392"/>
             </a:xfrm>
@@ -5888,9 +5933,9 @@
               <a:gdLst/>
               <a:ahLst/>
               <a:cxnLst/>
-              <a:rect r="r" b="b" t="t" l="l"/>
+              <a:rect l="l" t="t" r="r" b="b"/>
               <a:pathLst>
-                <a:path h="6565392" w="11643487">
+                <a:path w="11643487" h="6565392">
                   <a:moveTo>
                     <a:pt x="381000" y="0"/>
                   </a:moveTo>
@@ -5928,9 +5973,9 @@
               </a:pathLst>
             </a:custGeom>
             <a:blipFill>
-              <a:blip r:embed="rId8"/>
+              <a:blip r:embed="rId6"/>
               <a:stretch>
-                <a:fillRect l="0" t="-478" r="0" b="-303"/>
+                <a:fillRect t="-478" b="-303"/>
               </a:stretch>
             </a:blipFill>
           </p:spPr>
@@ -5938,12 +5983,12 @@
       </p:grpSp>
       <p:grpSp>
         <p:nvGrpSpPr>
-          <p:cNvPr name="Group 20" id="20"/>
+          <p:cNvPr id="20" name="Group 20"/>
           <p:cNvGrpSpPr/>
           <p:nvPr/>
         </p:nvGrpSpPr>
         <p:grpSpPr>
-          <a:xfrm rot="0">
+          <a:xfrm>
             <a:off x="1332309" y="2110816"/>
             <a:ext cx="5973166" cy="3032684"/>
             <a:chOff x="0" y="0"/>
@@ -5952,12 +5997,12 @@
         </p:grpSpPr>
         <p:sp>
           <p:nvSpPr>
-            <p:cNvPr name="Freeform 21" id="21"/>
+            <p:cNvPr id="21" name="Freeform 21"/>
             <p:cNvSpPr/>
             <p:nvPr/>
           </p:nvSpPr>
           <p:spPr>
-            <a:xfrm flipH="false" flipV="false" rot="0">
+            <a:xfrm>
               <a:off x="0" y="0"/>
               <a:ext cx="5973192" cy="3032636"/>
             </a:xfrm>
@@ -5966,9 +6011,9 @@
               <a:gdLst/>
               <a:ahLst/>
               <a:cxnLst/>
-              <a:rect r="r" b="b" t="t" l="l"/>
+              <a:rect l="l" t="t" r="r" b="b"/>
               <a:pathLst>
-                <a:path h="3032636" w="5973192">
+                <a:path w="5973192" h="3032636">
                   <a:moveTo>
                     <a:pt x="0" y="3032636"/>
                   </a:moveTo>
@@ -5995,12 +6040,12 @@
       </p:grpSp>
       <p:grpSp>
         <p:nvGrpSpPr>
-          <p:cNvPr name="Group 22" id="22"/>
+          <p:cNvPr id="22" name="Group 22"/>
           <p:cNvGrpSpPr/>
           <p:nvPr/>
         </p:nvGrpSpPr>
         <p:grpSpPr>
-          <a:xfrm rot="0">
+          <a:xfrm>
             <a:off x="1332309" y="5905500"/>
             <a:ext cx="5973166" cy="3352800"/>
             <a:chOff x="0" y="0"/>
@@ -6009,12 +6054,12 @@
         </p:grpSpPr>
         <p:sp>
           <p:nvSpPr>
-            <p:cNvPr name="Freeform 23" id="23"/>
+            <p:cNvPr id="23" name="Freeform 23"/>
             <p:cNvSpPr/>
             <p:nvPr/>
           </p:nvSpPr>
           <p:spPr>
-            <a:xfrm flipH="false" flipV="false" rot="0">
+            <a:xfrm>
               <a:off x="0" y="0"/>
               <a:ext cx="5973192" cy="3352800"/>
             </a:xfrm>
@@ -6023,9 +6068,9 @@
               <a:gdLst/>
               <a:ahLst/>
               <a:cxnLst/>
-              <a:rect r="r" b="b" t="t" l="l"/>
+              <a:rect l="l" t="t" r="r" b="b"/>
               <a:pathLst>
-                <a:path h="3352800" w="5973192">
+                <a:path w="5973192" h="3352800">
                   <a:moveTo>
                     <a:pt x="0" y="3352800"/>
                   </a:moveTo>
@@ -6052,12 +6097,12 @@
       </p:grpSp>
       <p:sp>
         <p:nvSpPr>
-          <p:cNvPr name="TextBox 24" id="24"/>
-          <p:cNvSpPr txBox="true"/>
+          <p:cNvPr id="24" name="TextBox 24"/>
+          <p:cNvSpPr txBox="1"/>
           <p:nvPr/>
         </p:nvSpPr>
         <p:spPr>
-          <a:xfrm rot="0">
+          <a:xfrm>
             <a:off x="8632260" y="1704994"/>
             <a:ext cx="5506498" cy="2132266"/>
           </a:xfrm>
@@ -6066,7 +6111,7 @@
           </a:prstGeom>
         </p:spPr>
         <p:txBody>
-          <a:bodyPr anchor="t" rtlCol="false" tIns="0" lIns="0" bIns="0" rIns="0">
+          <a:bodyPr lIns="0" tIns="0" rIns="0" bIns="0" rtlCol="0" anchor="t">
             <a:spAutoFit/>
           </a:bodyPr>
           <a:lstStyle/>
@@ -6077,7 +6122,7 @@
               </a:lnSpc>
             </a:pPr>
             <a:r>
-              <a:rPr lang="en-US" b="true" sz="8271">
+              <a:rPr lang="en-US" sz="8271" b="1">
                 <a:solidFill>
                   <a:srgbClr val="F7F9FC"/>
                 </a:solidFill>
@@ -6093,12 +6138,12 @@
       </p:sp>
       <p:sp>
         <p:nvSpPr>
-          <p:cNvPr name="TextBox 25" id="25"/>
-          <p:cNvSpPr txBox="true"/>
+          <p:cNvPr id="25" name="TextBox 25"/>
+          <p:cNvSpPr txBox="1"/>
           <p:nvPr/>
         </p:nvSpPr>
         <p:spPr>
-          <a:xfrm rot="0">
+          <a:xfrm>
             <a:off x="1743856" y="2395137"/>
             <a:ext cx="2638377" cy="466430"/>
           </a:xfrm>
@@ -6107,7 +6152,7 @@
           </a:prstGeom>
         </p:spPr>
         <p:txBody>
-          <a:bodyPr anchor="t" rtlCol="false" tIns="0" lIns="0" bIns="0" rIns="0">
+          <a:bodyPr lIns="0" tIns="0" rIns="0" bIns="0" rtlCol="0" anchor="t">
             <a:spAutoFit/>
           </a:bodyPr>
           <a:lstStyle/>
@@ -6118,7 +6163,7 @@
               </a:lnSpc>
             </a:pPr>
             <a:r>
-              <a:rPr lang="en-US" b="true" sz="2598">
+              <a:rPr lang="en-US" sz="2598" b="1">
                 <a:solidFill>
                   <a:srgbClr val="F7F9FC"/>
                 </a:solidFill>
@@ -6134,12 +6179,12 @@
       </p:sp>
       <p:sp>
         <p:nvSpPr>
-          <p:cNvPr name="TextBox 26" id="26"/>
-          <p:cNvSpPr txBox="true"/>
+          <p:cNvPr id="26" name="TextBox 26"/>
+          <p:cNvSpPr txBox="1"/>
           <p:nvPr/>
         </p:nvSpPr>
         <p:spPr>
-          <a:xfrm rot="0">
+          <a:xfrm>
             <a:off x="2204876" y="6953269"/>
             <a:ext cx="2529354" cy="1706728"/>
           </a:xfrm>
@@ -6148,7 +6193,7 @@
           </a:prstGeom>
         </p:spPr>
         <p:txBody>
-          <a:bodyPr anchor="t" rtlCol="false" tIns="0" lIns="0" bIns="0" rIns="0">
+          <a:bodyPr lIns="0" tIns="0" rIns="0" bIns="0" rtlCol="0" anchor="t">
             <a:spAutoFit/>
           </a:bodyPr>
           <a:lstStyle/>
@@ -6175,12 +6220,12 @@
       </p:sp>
       <p:sp>
         <p:nvSpPr>
-          <p:cNvPr name="TextBox 27" id="27"/>
-          <p:cNvSpPr txBox="true"/>
+          <p:cNvPr id="27" name="TextBox 27"/>
+          <p:cNvSpPr txBox="1"/>
           <p:nvPr/>
         </p:nvSpPr>
         <p:spPr>
-          <a:xfrm rot="0">
+          <a:xfrm>
             <a:off x="2292048" y="3039094"/>
             <a:ext cx="3242691" cy="1555852"/>
           </a:xfrm>
@@ -6189,7 +6234,7 @@
           </a:prstGeom>
         </p:spPr>
         <p:txBody>
-          <a:bodyPr anchor="t" rtlCol="false" tIns="0" lIns="0" bIns="0" rIns="0">
+          <a:bodyPr lIns="0" tIns="0" rIns="0" bIns="0" rtlCol="0" anchor="t">
             <a:spAutoFit/>
           </a:bodyPr>
           <a:lstStyle/>
@@ -6216,12 +6261,12 @@
       </p:sp>
       <p:sp>
         <p:nvSpPr>
-          <p:cNvPr name="TextBox 28" id="28"/>
-          <p:cNvSpPr txBox="true"/>
+          <p:cNvPr id="28" name="TextBox 28"/>
+          <p:cNvSpPr txBox="1"/>
           <p:nvPr/>
         </p:nvSpPr>
         <p:spPr>
-          <a:xfrm rot="0">
+          <a:xfrm>
             <a:off x="1658903" y="6365958"/>
             <a:ext cx="2958398" cy="441074"/>
           </a:xfrm>
@@ -6230,7 +6275,7 @@
           </a:prstGeom>
         </p:spPr>
         <p:txBody>
-          <a:bodyPr anchor="t" rtlCol="false" tIns="0" lIns="0" bIns="0" rIns="0">
+          <a:bodyPr lIns="0" tIns="0" rIns="0" bIns="0" rtlCol="0" anchor="t">
             <a:spAutoFit/>
           </a:bodyPr>
           <a:lstStyle/>
@@ -6241,7 +6286,7 @@
               </a:lnSpc>
             </a:pPr>
             <a:r>
-              <a:rPr lang="en-US" b="true" sz="2497">
+              <a:rPr lang="en-US" sz="2497" b="1">
                 <a:solidFill>
                   <a:srgbClr val="F7F9FC"/>
                 </a:solidFill>
@@ -6264,13 +6309,14 @@
 </file>
 
 <file path=ppt/slides/slide5.xml><?xml version="1.0" encoding="utf-8"?>
-<p:sld xmlns:p="http://schemas.openxmlformats.org/presentationml/2006/main" xmlns:a="http://schemas.openxmlformats.org/drawingml/2006/main" xmlns:r="http://schemas.openxmlformats.org/officeDocument/2006/relationships">
+<p:sld xmlns:a="http://schemas.openxmlformats.org/drawingml/2006/main" xmlns:r="http://schemas.openxmlformats.org/officeDocument/2006/relationships" xmlns:p="http://schemas.openxmlformats.org/presentationml/2006/main">
   <p:cSld>
     <p:bg>
       <p:bgPr>
         <a:solidFill>
           <a:srgbClr val="172B4D"/>
         </a:solidFill>
+        <a:effectLst/>
       </p:bgPr>
     </p:bg>
     <p:spTree>
@@ -6289,12 +6335,12 @@
       </p:grpSpPr>
       <p:sp>
         <p:nvSpPr>
-          <p:cNvPr name="Freeform 2" id="2"/>
+          <p:cNvPr id="2" name="Freeform 2"/>
           <p:cNvSpPr/>
           <p:nvPr/>
         </p:nvSpPr>
         <p:spPr>
-          <a:xfrm flipH="false" flipV="false" rot="0">
+          <a:xfrm>
             <a:off x="6613465" y="3151537"/>
             <a:ext cx="5215004" cy="2940625"/>
           </a:xfrm>
@@ -6303,9 +6349,9 @@
             <a:gdLst/>
             <a:ahLst/>
             <a:cxnLst/>
-            <a:rect r="r" b="b" t="t" l="l"/>
+            <a:rect l="l" t="t" r="r" b="b"/>
             <a:pathLst>
-              <a:path h="2940625" w="5215004">
+              <a:path w="5215004" h="2940625">
                 <a:moveTo>
                   <a:pt x="0" y="0"/>
                 </a:moveTo>
@@ -6326,27 +6372,27 @@
             </a:pathLst>
           </a:custGeom>
           <a:blipFill>
-            <a:blip r:embed="rId2">
+            <a:blip>
               <a:extLst>
                 <a:ext uri="{96DAC541-7B7A-43D3-8B79-37D633B846F1}">
-                  <asvg:svgBlip xmlns:asvg="http://schemas.microsoft.com/office/drawing/2016/SVG/main" r:embed="rId3"/>
+                  <asvg:svgBlip xmlns:asvg="http://schemas.microsoft.com/office/drawing/2016/SVG/main" r:embed="rId2"/>
                 </a:ext>
               </a:extLst>
             </a:blip>
             <a:stretch>
-              <a:fillRect l="0" t="0" r="0" b="0"/>
+              <a:fillRect/>
             </a:stretch>
           </a:blipFill>
         </p:spPr>
       </p:sp>
       <p:sp>
         <p:nvSpPr>
-          <p:cNvPr name="Freeform 3" id="3"/>
+          <p:cNvPr id="3" name="Freeform 3"/>
           <p:cNvSpPr/>
           <p:nvPr/>
         </p:nvSpPr>
         <p:spPr>
-          <a:xfrm flipH="false" flipV="false" rot="0">
+          <a:xfrm>
             <a:off x="6613465" y="6317675"/>
             <a:ext cx="5215004" cy="2940625"/>
           </a:xfrm>
@@ -6355,9 +6401,9 @@
             <a:gdLst/>
             <a:ahLst/>
             <a:cxnLst/>
-            <a:rect r="r" b="b" t="t" l="l"/>
+            <a:rect l="l" t="t" r="r" b="b"/>
             <a:pathLst>
-              <a:path h="2940625" w="5215004">
+              <a:path w="5215004" h="2940625">
                 <a:moveTo>
                   <a:pt x="0" y="0"/>
                 </a:moveTo>
@@ -6378,27 +6424,27 @@
             </a:pathLst>
           </a:custGeom>
           <a:blipFill>
-            <a:blip r:embed="rId4">
+            <a:blip>
               <a:extLst>
                 <a:ext uri="{96DAC541-7B7A-43D3-8B79-37D633B846F1}">
-                  <asvg:svgBlip xmlns:asvg="http://schemas.microsoft.com/office/drawing/2016/SVG/main" r:embed="rId5"/>
+                  <asvg:svgBlip xmlns:asvg="http://schemas.microsoft.com/office/drawing/2016/SVG/main" r:embed="rId3"/>
                 </a:ext>
               </a:extLst>
             </a:blip>
             <a:stretch>
-              <a:fillRect l="0" t="0" r="0" b="0"/>
+              <a:fillRect/>
             </a:stretch>
           </a:blipFill>
         </p:spPr>
       </p:sp>
       <p:sp>
         <p:nvSpPr>
-          <p:cNvPr name="Freeform 4" id="4"/>
+          <p:cNvPr id="4" name="Freeform 4"/>
           <p:cNvSpPr/>
           <p:nvPr/>
         </p:nvSpPr>
         <p:spPr>
-          <a:xfrm flipH="false" flipV="false" rot="0">
+          <a:xfrm>
             <a:off x="12045820" y="3151537"/>
             <a:ext cx="5215004" cy="2940625"/>
           </a:xfrm>
@@ -6407,9 +6453,9 @@
             <a:gdLst/>
             <a:ahLst/>
             <a:cxnLst/>
-            <a:rect r="r" b="b" t="t" l="l"/>
+            <a:rect l="l" t="t" r="r" b="b"/>
             <a:pathLst>
-              <a:path h="2940625" w="5215004">
+              <a:path w="5215004" h="2940625">
                 <a:moveTo>
                   <a:pt x="0" y="0"/>
                 </a:moveTo>
@@ -6430,27 +6476,27 @@
             </a:pathLst>
           </a:custGeom>
           <a:blipFill>
-            <a:blip r:embed="rId4">
+            <a:blip>
               <a:extLst>
                 <a:ext uri="{96DAC541-7B7A-43D3-8B79-37D633B846F1}">
-                  <asvg:svgBlip xmlns:asvg="http://schemas.microsoft.com/office/drawing/2016/SVG/main" r:embed="rId6"/>
+                  <asvg:svgBlip xmlns:asvg="http://schemas.microsoft.com/office/drawing/2016/SVG/main" r:embed="rId4"/>
                 </a:ext>
               </a:extLst>
             </a:blip>
             <a:stretch>
-              <a:fillRect l="0" t="0" r="0" b="0"/>
+              <a:fillRect/>
             </a:stretch>
           </a:blipFill>
         </p:spPr>
       </p:sp>
       <p:sp>
         <p:nvSpPr>
-          <p:cNvPr name="Freeform 5" id="5"/>
+          <p:cNvPr id="5" name="Freeform 5"/>
           <p:cNvSpPr/>
           <p:nvPr/>
         </p:nvSpPr>
         <p:spPr>
-          <a:xfrm flipH="false" flipV="false" rot="0">
+          <a:xfrm>
             <a:off x="12045820" y="6317675"/>
             <a:ext cx="5215004" cy="2940625"/>
           </a:xfrm>
@@ -6459,9 +6505,9 @@
             <a:gdLst/>
             <a:ahLst/>
             <a:cxnLst/>
-            <a:rect r="r" b="b" t="t" l="l"/>
+            <a:rect l="l" t="t" r="r" b="b"/>
             <a:pathLst>
-              <a:path h="2940625" w="5215004">
+              <a:path w="5215004" h="2940625">
                 <a:moveTo>
                   <a:pt x="0" y="0"/>
                 </a:moveTo>
@@ -6482,27 +6528,27 @@
             </a:pathLst>
           </a:custGeom>
           <a:blipFill>
-            <a:blip r:embed="rId4">
+            <a:blip>
               <a:extLst>
                 <a:ext uri="{96DAC541-7B7A-43D3-8B79-37D633B846F1}">
-                  <asvg:svgBlip xmlns:asvg="http://schemas.microsoft.com/office/drawing/2016/SVG/main" r:embed="rId7"/>
+                  <asvg:svgBlip xmlns:asvg="http://schemas.microsoft.com/office/drawing/2016/SVG/main" r:embed="rId5"/>
                 </a:ext>
               </a:extLst>
             </a:blip>
             <a:stretch>
-              <a:fillRect l="0" t="0" r="0" b="0"/>
+              <a:fillRect/>
             </a:stretch>
           </a:blipFill>
         </p:spPr>
       </p:sp>
       <p:grpSp>
         <p:nvGrpSpPr>
-          <p:cNvPr name="Group 6" id="6"/>
+          <p:cNvPr id="6" name="Group 6"/>
           <p:cNvGrpSpPr/>
           <p:nvPr/>
         </p:nvGrpSpPr>
         <p:grpSpPr>
-          <a:xfrm rot="0">
+          <a:xfrm>
             <a:off x="0" y="3684146"/>
             <a:ext cx="5889565" cy="6602063"/>
             <a:chOff x="0" y="0"/>
@@ -6511,12 +6557,12 @@
         </p:grpSpPr>
         <p:sp>
           <p:nvSpPr>
-            <p:cNvPr name="Freeform 7" id="7"/>
+            <p:cNvPr id="7" name="Freeform 7"/>
             <p:cNvSpPr/>
             <p:nvPr/>
           </p:nvSpPr>
           <p:spPr>
-            <a:xfrm flipH="false" flipV="false" rot="0">
+            <a:xfrm>
               <a:off x="0" y="0"/>
               <a:ext cx="7852791" cy="8802751"/>
             </a:xfrm>
@@ -6525,9 +6571,9 @@
               <a:gdLst/>
               <a:ahLst/>
               <a:cxnLst/>
-              <a:rect r="r" b="b" t="t" l="l"/>
+              <a:rect l="l" t="t" r="r" b="b"/>
               <a:pathLst>
-                <a:path h="8802751" w="7852791">
+                <a:path w="7852791" h="8802751">
                   <a:moveTo>
                     <a:pt x="3026664" y="0"/>
                   </a:moveTo>
@@ -6570,9 +6616,9 @@
               </a:pathLst>
             </a:custGeom>
             <a:blipFill>
-              <a:blip r:embed="rId8"/>
+              <a:blip r:embed="rId6"/>
               <a:stretch>
-                <a:fillRect l="-22979" t="-11" r="-79" b="0"/>
+                <a:fillRect l="-22979" t="-11" r="-79"/>
               </a:stretch>
             </a:blipFill>
           </p:spPr>
@@ -6580,12 +6626,12 @@
       </p:grpSp>
       <p:grpSp>
         <p:nvGrpSpPr>
-          <p:cNvPr name="Group 8" id="8"/>
+          <p:cNvPr id="8" name="Group 8"/>
           <p:cNvGrpSpPr/>
           <p:nvPr/>
         </p:nvGrpSpPr>
         <p:grpSpPr>
-          <a:xfrm rot="0">
+          <a:xfrm>
             <a:off x="0" y="2561572"/>
             <a:ext cx="6272064" cy="8065632"/>
             <a:chOff x="0" y="0"/>
@@ -6594,12 +6640,12 @@
         </p:grpSpPr>
         <p:sp>
           <p:nvSpPr>
-            <p:cNvPr name="Freeform 9" id="9"/>
+            <p:cNvPr id="9" name="Freeform 9"/>
             <p:cNvSpPr/>
             <p:nvPr/>
           </p:nvSpPr>
           <p:spPr>
-            <a:xfrm flipH="false" flipV="false" rot="0">
+            <a:xfrm>
               <a:off x="0" y="0"/>
               <a:ext cx="8168005" cy="10503691"/>
             </a:xfrm>
@@ -6608,9 +6654,9 @@
               <a:gdLst/>
               <a:ahLst/>
               <a:cxnLst/>
-              <a:rect r="r" b="b" t="t" l="l"/>
+              <a:rect l="l" t="t" r="r" b="b"/>
               <a:pathLst>
-                <a:path h="10503691" w="8168005">
+                <a:path w="8168005" h="10503691">
                   <a:moveTo>
                     <a:pt x="381000" y="0"/>
                   </a:moveTo>
@@ -6668,9 +6714,9 @@
               </a:pathLst>
             </a:custGeom>
             <a:blipFill>
-              <a:blip r:embed="rId9"/>
+              <a:blip r:embed="rId7"/>
               <a:stretch>
-                <a:fillRect l="-214" t="-62" r="-214" b="0"/>
+                <a:fillRect l="-214" t="-62" r="-214"/>
               </a:stretch>
             </a:blipFill>
           </p:spPr>
@@ -6678,12 +6724,12 @@
       </p:grpSp>
       <p:grpSp>
         <p:nvGrpSpPr>
-          <p:cNvPr name="Group 10" id="10"/>
+          <p:cNvPr id="10" name="Group 10"/>
           <p:cNvGrpSpPr/>
           <p:nvPr/>
         </p:nvGrpSpPr>
         <p:grpSpPr>
-          <a:xfrm rot="0">
+          <a:xfrm>
             <a:off x="6613465" y="3151537"/>
             <a:ext cx="5213480" cy="2940625"/>
             <a:chOff x="0" y="0"/>
@@ -6692,12 +6738,12 @@
         </p:grpSpPr>
         <p:sp>
           <p:nvSpPr>
-            <p:cNvPr name="Freeform 11" id="11"/>
+            <p:cNvPr id="11" name="Freeform 11"/>
             <p:cNvSpPr/>
             <p:nvPr/>
           </p:nvSpPr>
           <p:spPr>
-            <a:xfrm flipH="false" flipV="false" rot="0">
+            <a:xfrm>
               <a:off x="0" y="0"/>
               <a:ext cx="5213477" cy="2940559"/>
             </a:xfrm>
@@ -6706,9 +6752,9 @@
               <a:gdLst/>
               <a:ahLst/>
               <a:cxnLst/>
-              <a:rect r="r" b="b" t="t" l="l"/>
+              <a:rect l="l" t="t" r="r" b="b"/>
               <a:pathLst>
-                <a:path h="2940559" w="5213477">
+                <a:path w="5213477" h="2940559">
                   <a:moveTo>
                     <a:pt x="0" y="2940559"/>
                   </a:moveTo>
@@ -6735,12 +6781,12 @@
       </p:grpSp>
       <p:grpSp>
         <p:nvGrpSpPr>
-          <p:cNvPr name="Group 12" id="12"/>
+          <p:cNvPr id="12" name="Group 12"/>
           <p:cNvGrpSpPr/>
           <p:nvPr/>
         </p:nvGrpSpPr>
         <p:grpSpPr>
-          <a:xfrm rot="0">
+          <a:xfrm>
             <a:off x="6613465" y="6317675"/>
             <a:ext cx="5213480" cy="2940625"/>
             <a:chOff x="0" y="0"/>
@@ -6749,12 +6795,12 @@
         </p:grpSpPr>
         <p:sp>
           <p:nvSpPr>
-            <p:cNvPr name="Freeform 13" id="13"/>
+            <p:cNvPr id="13" name="Freeform 13"/>
             <p:cNvSpPr/>
             <p:nvPr/>
           </p:nvSpPr>
           <p:spPr>
-            <a:xfrm flipH="false" flipV="false" rot="0">
+            <a:xfrm>
               <a:off x="0" y="0"/>
               <a:ext cx="5213477" cy="2940559"/>
             </a:xfrm>
@@ -6763,9 +6809,9 @@
               <a:gdLst/>
               <a:ahLst/>
               <a:cxnLst/>
-              <a:rect r="r" b="b" t="t" l="l"/>
+              <a:rect l="l" t="t" r="r" b="b"/>
               <a:pathLst>
-                <a:path h="2940559" w="5213477">
+                <a:path w="5213477" h="2940559">
                   <a:moveTo>
                     <a:pt x="0" y="2940559"/>
                   </a:moveTo>
@@ -6792,12 +6838,12 @@
       </p:grpSp>
       <p:grpSp>
         <p:nvGrpSpPr>
-          <p:cNvPr name="Group 14" id="14"/>
+          <p:cNvPr id="14" name="Group 14"/>
           <p:cNvGrpSpPr/>
           <p:nvPr/>
         </p:nvGrpSpPr>
         <p:grpSpPr>
-          <a:xfrm rot="0">
+          <a:xfrm>
             <a:off x="12045820" y="3151537"/>
             <a:ext cx="5213480" cy="2940625"/>
             <a:chOff x="0" y="0"/>
@@ -6806,12 +6852,12 @@
         </p:grpSpPr>
         <p:sp>
           <p:nvSpPr>
-            <p:cNvPr name="Freeform 15" id="15"/>
+            <p:cNvPr id="15" name="Freeform 15"/>
             <p:cNvSpPr/>
             <p:nvPr/>
           </p:nvSpPr>
           <p:spPr>
-            <a:xfrm flipH="false" flipV="false" rot="0">
+            <a:xfrm>
               <a:off x="0" y="0"/>
               <a:ext cx="5213478" cy="2940559"/>
             </a:xfrm>
@@ -6820,9 +6866,9 @@
               <a:gdLst/>
               <a:ahLst/>
               <a:cxnLst/>
-              <a:rect r="r" b="b" t="t" l="l"/>
+              <a:rect l="l" t="t" r="r" b="b"/>
               <a:pathLst>
-                <a:path h="2940559" w="5213478">
+                <a:path w="5213478" h="2940559">
                   <a:moveTo>
                     <a:pt x="0" y="2940559"/>
                   </a:moveTo>
@@ -6849,12 +6895,12 @@
       </p:grpSp>
       <p:grpSp>
         <p:nvGrpSpPr>
-          <p:cNvPr name="Group 16" id="16"/>
+          <p:cNvPr id="16" name="Group 16"/>
           <p:cNvGrpSpPr/>
           <p:nvPr/>
         </p:nvGrpSpPr>
         <p:grpSpPr>
-          <a:xfrm rot="0">
+          <a:xfrm>
             <a:off x="12045820" y="6317675"/>
             <a:ext cx="5213480" cy="2940625"/>
             <a:chOff x="0" y="0"/>
@@ -6863,12 +6909,12 @@
         </p:grpSpPr>
         <p:sp>
           <p:nvSpPr>
-            <p:cNvPr name="Freeform 17" id="17"/>
+            <p:cNvPr id="17" name="Freeform 17"/>
             <p:cNvSpPr/>
             <p:nvPr/>
           </p:nvSpPr>
           <p:spPr>
-            <a:xfrm flipH="false" flipV="false" rot="0">
+            <a:xfrm>
               <a:off x="0" y="0"/>
               <a:ext cx="5213478" cy="2940559"/>
             </a:xfrm>
@@ -6877,9 +6923,9 @@
               <a:gdLst/>
               <a:ahLst/>
               <a:cxnLst/>
-              <a:rect r="r" b="b" t="t" l="l"/>
+              <a:rect l="l" t="t" r="r" b="b"/>
               <a:pathLst>
-                <a:path h="2940559" w="5213478">
+                <a:path w="5213478" h="2940559">
                   <a:moveTo>
                     <a:pt x="0" y="2940559"/>
                   </a:moveTo>
@@ -6906,12 +6952,12 @@
       </p:grpSp>
       <p:sp>
         <p:nvSpPr>
-          <p:cNvPr name="TextBox 18" id="18"/>
-          <p:cNvSpPr txBox="true"/>
+          <p:cNvPr id="18" name="TextBox 18"/>
+          <p:cNvSpPr txBox="1"/>
           <p:nvPr/>
         </p:nvSpPr>
         <p:spPr>
-          <a:xfrm rot="0">
+          <a:xfrm>
             <a:off x="8733625" y="3854653"/>
             <a:ext cx="837076" cy="1693240"/>
           </a:xfrm>
@@ -6920,7 +6966,7 @@
           </a:prstGeom>
         </p:spPr>
         <p:txBody>
-          <a:bodyPr anchor="t" rtlCol="false" tIns="0" lIns="0" bIns="0" rIns="0">
+          <a:bodyPr lIns="0" tIns="0" rIns="0" bIns="0" rtlCol="0" anchor="t">
             <a:spAutoFit/>
           </a:bodyPr>
           <a:lstStyle/>
@@ -6931,7 +6977,7 @@
               </a:lnSpc>
             </a:pPr>
             <a:r>
-              <a:rPr lang="en-US" b="true" sz="6580">
+              <a:rPr lang="en-US" sz="6580" b="1">
                 <a:solidFill>
                   <a:srgbClr val="F7F9FC"/>
                 </a:solidFill>
@@ -6940,10 +6986,39 @@
                 <a:cs typeface="Montserrat Bold"/>
                 <a:sym typeface="Montserrat Bold"/>
               </a:rPr>
-              <a:t>12</a:t>
-            </a:r>
-            <a:r>
-              <a:rPr lang="en-US" b="true" sz="6580">
+              <a:t>12 </a:t>
+            </a:r>
+          </a:p>
+        </p:txBody>
+      </p:sp>
+      <p:sp>
+        <p:nvSpPr>
+          <p:cNvPr id="19" name="TextBox 19"/>
+          <p:cNvSpPr txBox="1"/>
+          <p:nvPr/>
+        </p:nvSpPr>
+        <p:spPr>
+          <a:xfrm>
+            <a:off x="8583120" y="6844817"/>
+            <a:ext cx="1025452" cy="1692231"/>
+          </a:xfrm>
+          <a:prstGeom prst="rect">
+            <a:avLst/>
+          </a:prstGeom>
+        </p:spPr>
+        <p:txBody>
+          <a:bodyPr lIns="0" tIns="0" rIns="0" bIns="0" rtlCol="0" anchor="t">
+            <a:spAutoFit/>
+          </a:bodyPr>
+          <a:lstStyle/>
+          <a:p>
+            <a:pPr algn="l">
+              <a:lnSpc>
+                <a:spcPts val="9212"/>
+              </a:lnSpc>
+            </a:pPr>
+            <a:r>
+              <a:rPr lang="en-US" sz="6580" b="1">
                 <a:solidFill>
                   <a:srgbClr val="F7F9FC"/>
                 </a:solidFill>
@@ -6952,28 +7027,28 @@
                 <a:cs typeface="Montserrat Bold"/>
                 <a:sym typeface="Montserrat Bold"/>
               </a:rPr>
-              <a:t> </a:t>
-            </a:r>
-          </a:p>
-        </p:txBody>
-      </p:sp>
-      <p:sp>
-        <p:nvSpPr>
-          <p:cNvPr name="TextBox 19" id="19"/>
-          <p:cNvSpPr txBox="true"/>
+              <a:t>57 </a:t>
+            </a:r>
+          </a:p>
+        </p:txBody>
+      </p:sp>
+      <p:sp>
+        <p:nvSpPr>
+          <p:cNvPr id="20" name="TextBox 20"/>
+          <p:cNvSpPr txBox="1"/>
           <p:nvPr/>
         </p:nvSpPr>
         <p:spPr>
-          <a:xfrm rot="0">
-            <a:off x="8583120" y="6844817"/>
-            <a:ext cx="1025452" cy="1692231"/>
+          <a:xfrm>
+            <a:off x="14117174" y="3720417"/>
+            <a:ext cx="1091936" cy="1728473"/>
           </a:xfrm>
           <a:prstGeom prst="rect">
             <a:avLst/>
           </a:prstGeom>
         </p:spPr>
         <p:txBody>
-          <a:bodyPr anchor="t" rtlCol="false" tIns="0" lIns="0" bIns="0" rIns="0">
+          <a:bodyPr lIns="0" tIns="0" rIns="0" bIns="0" rtlCol="0" anchor="t">
             <a:spAutoFit/>
           </a:bodyPr>
           <a:lstStyle/>
@@ -6984,7 +7059,7 @@
               </a:lnSpc>
             </a:pPr>
             <a:r>
-              <a:rPr lang="en-US" b="true" sz="6580">
+              <a:rPr lang="en-US" sz="6580" b="1">
                 <a:solidFill>
                   <a:srgbClr val="F7F9FC"/>
                 </a:solidFill>
@@ -6993,93 +7068,28 @@
                 <a:cs typeface="Montserrat Bold"/>
                 <a:sym typeface="Montserrat Bold"/>
               </a:rPr>
-              <a:t>57</a:t>
-            </a:r>
-            <a:r>
-              <a:rPr lang="en-US" b="true" sz="6580">
-                <a:solidFill>
-                  <a:srgbClr val="F7F9FC"/>
-                </a:solidFill>
-                <a:latin typeface="Montserrat Bold"/>
-                <a:ea typeface="Montserrat Bold"/>
-                <a:cs typeface="Montserrat Bold"/>
-                <a:sym typeface="Montserrat Bold"/>
-              </a:rPr>
-              <a:t> </a:t>
-            </a:r>
-          </a:p>
-        </p:txBody>
-      </p:sp>
-      <p:sp>
-        <p:nvSpPr>
-          <p:cNvPr name="TextBox 20" id="20"/>
-          <p:cNvSpPr txBox="true"/>
+              <a:t>34 </a:t>
+            </a:r>
+          </a:p>
+        </p:txBody>
+      </p:sp>
+      <p:sp>
+        <p:nvSpPr>
+          <p:cNvPr id="21" name="TextBox 21"/>
+          <p:cNvSpPr txBox="1"/>
           <p:nvPr/>
         </p:nvSpPr>
         <p:spPr>
-          <a:xfrm rot="0">
-            <a:off x="14117174" y="3720417"/>
-            <a:ext cx="1091936" cy="1728473"/>
+          <a:xfrm>
+            <a:off x="13587822" y="7224360"/>
+            <a:ext cx="2131000" cy="1730331"/>
           </a:xfrm>
           <a:prstGeom prst="rect">
             <a:avLst/>
           </a:prstGeom>
         </p:spPr>
         <p:txBody>
-          <a:bodyPr anchor="t" rtlCol="false" tIns="0" lIns="0" bIns="0" rIns="0">
-            <a:spAutoFit/>
-          </a:bodyPr>
-          <a:lstStyle/>
-          <a:p>
-            <a:pPr algn="l">
-              <a:lnSpc>
-                <a:spcPts val="9212"/>
-              </a:lnSpc>
-            </a:pPr>
-            <a:r>
-              <a:rPr lang="en-US" b="true" sz="6580">
-                <a:solidFill>
-                  <a:srgbClr val="F7F9FC"/>
-                </a:solidFill>
-                <a:latin typeface="Montserrat Bold"/>
-                <a:ea typeface="Montserrat Bold"/>
-                <a:cs typeface="Montserrat Bold"/>
-                <a:sym typeface="Montserrat Bold"/>
-              </a:rPr>
-              <a:t>34</a:t>
-            </a:r>
-            <a:r>
-              <a:rPr lang="en-US" b="true" sz="6580">
-                <a:solidFill>
-                  <a:srgbClr val="F7F9FC"/>
-                </a:solidFill>
-                <a:latin typeface="Montserrat Bold"/>
-                <a:ea typeface="Montserrat Bold"/>
-                <a:cs typeface="Montserrat Bold"/>
-                <a:sym typeface="Montserrat Bold"/>
-              </a:rPr>
-              <a:t> </a:t>
-            </a:r>
-          </a:p>
-        </p:txBody>
-      </p:sp>
-      <p:sp>
-        <p:nvSpPr>
-          <p:cNvPr name="TextBox 21" id="21"/>
-          <p:cNvSpPr txBox="true"/>
-          <p:nvPr/>
-        </p:nvSpPr>
-        <p:spPr>
-          <a:xfrm rot="0">
-            <a:off x="13587822" y="7224360"/>
-            <a:ext cx="2131000" cy="1730331"/>
-          </a:xfrm>
-          <a:prstGeom prst="rect">
-            <a:avLst/>
-          </a:prstGeom>
-        </p:spPr>
-        <p:txBody>
-          <a:bodyPr anchor="t" rtlCol="false" tIns="0" lIns="0" bIns="0" rIns="0">
+          <a:bodyPr lIns="0" tIns="0" rIns="0" bIns="0" rtlCol="0" anchor="t">
             <a:spAutoFit/>
           </a:bodyPr>
           <a:lstStyle/>
@@ -7090,7 +7100,7 @@
               </a:lnSpc>
             </a:pPr>
             <a:r>
-              <a:rPr lang="en-US" b="true" sz="6580">
+              <a:rPr lang="en-US" sz="6580" b="1">
                 <a:solidFill>
                   <a:srgbClr val="F7F9FC"/>
                 </a:solidFill>
@@ -7106,12 +7116,12 @@
       </p:sp>
       <p:sp>
         <p:nvSpPr>
-          <p:cNvPr name="TextBox 22" id="22"/>
-          <p:cNvSpPr txBox="true"/>
+          <p:cNvPr id="22" name="TextBox 22"/>
+          <p:cNvSpPr txBox="1"/>
           <p:nvPr/>
         </p:nvSpPr>
         <p:spPr>
-          <a:xfrm rot="0">
+          <a:xfrm>
             <a:off x="3277981" y="964882"/>
             <a:ext cx="12680090" cy="1140190"/>
           </a:xfrm>
@@ -7120,7 +7130,7 @@
           </a:prstGeom>
         </p:spPr>
         <p:txBody>
-          <a:bodyPr anchor="t" rtlCol="false" tIns="0" lIns="0" bIns="0" rIns="0">
+          <a:bodyPr lIns="0" tIns="0" rIns="0" bIns="0" rtlCol="0" anchor="t">
             <a:spAutoFit/>
           </a:bodyPr>
           <a:lstStyle/>
@@ -7131,7 +7141,7 @@
               </a:lnSpc>
             </a:pPr>
             <a:r>
-              <a:rPr lang="en-US" b="true" sz="6580">
+              <a:rPr lang="en-US" sz="6580" b="1">
                 <a:solidFill>
                   <a:srgbClr val="F7F9FC"/>
                 </a:solidFill>
@@ -7147,12 +7157,12 @@
       </p:sp>
       <p:sp>
         <p:nvSpPr>
-          <p:cNvPr name="TextBox 23" id="23"/>
-          <p:cNvSpPr txBox="true"/>
+          <p:cNvPr id="23" name="TextBox 23"/>
+          <p:cNvSpPr txBox="1"/>
           <p:nvPr/>
         </p:nvSpPr>
         <p:spPr>
-          <a:xfrm rot="0">
+          <a:xfrm>
             <a:off x="8045082" y="5128946"/>
             <a:ext cx="2396985" cy="406860"/>
           </a:xfrm>
@@ -7161,7 +7171,7 @@
           </a:prstGeom>
         </p:spPr>
         <p:txBody>
-          <a:bodyPr anchor="t" rtlCol="false" tIns="0" lIns="0" bIns="0" rIns="0">
+          <a:bodyPr lIns="0" tIns="0" rIns="0" bIns="0" rtlCol="0" anchor="t">
             <a:spAutoFit/>
           </a:bodyPr>
           <a:lstStyle/>
@@ -7172,7 +7182,7 @@
               </a:lnSpc>
             </a:pPr>
             <a:r>
-              <a:rPr lang="en-US" b="true" sz="2340">
+              <a:rPr lang="en-US" sz="2340" b="1">
                 <a:solidFill>
                   <a:srgbClr val="F7F9FC"/>
                 </a:solidFill>
@@ -7184,7 +7194,7 @@
               <a:t>Rivals</a:t>
             </a:r>
             <a:r>
-              <a:rPr lang="en-US" b="true" sz="2340">
+              <a:rPr lang="en-US" sz="2340" b="1">
                 <a:solidFill>
                   <a:srgbClr val="000000"/>
                 </a:solidFill>
@@ -7196,7 +7206,7 @@
               <a:t> </a:t>
             </a:r>
             <a:r>
-              <a:rPr lang="en-US" b="true" sz="2340">
+              <a:rPr lang="en-US" sz="2340" b="1">
                 <a:solidFill>
                   <a:srgbClr val="F7F9FC"/>
                 </a:solidFill>
@@ -7208,7 +7218,7 @@
               <a:t>(0–300</a:t>
             </a:r>
             <a:r>
-              <a:rPr lang="en-US" b="true" sz="2340">
+              <a:rPr lang="en-US" sz="2340" b="1">
                 <a:solidFill>
                   <a:srgbClr val="000000"/>
                 </a:solidFill>
@@ -7220,7 +7230,7 @@
               <a:t> </a:t>
             </a:r>
             <a:r>
-              <a:rPr lang="en-US" b="true" sz="2340">
+              <a:rPr lang="en-US" sz="2340" b="1">
                 <a:solidFill>
                   <a:srgbClr val="F7F9FC"/>
                 </a:solidFill>
@@ -7236,12 +7246,12 @@
       </p:sp>
       <p:sp>
         <p:nvSpPr>
-          <p:cNvPr name="TextBox 24" id="24"/>
-          <p:cNvSpPr txBox="true"/>
+          <p:cNvPr id="24" name="TextBox 24"/>
+          <p:cNvSpPr txBox="1"/>
           <p:nvPr/>
         </p:nvSpPr>
         <p:spPr>
-          <a:xfrm rot="0">
+          <a:xfrm>
             <a:off x="7991361" y="8118100"/>
             <a:ext cx="2506666" cy="406860"/>
           </a:xfrm>
@@ -7250,7 +7260,7 @@
           </a:prstGeom>
         </p:spPr>
         <p:txBody>
-          <a:bodyPr anchor="t" rtlCol="false" tIns="0" lIns="0" bIns="0" rIns="0">
+          <a:bodyPr lIns="0" tIns="0" rIns="0" bIns="0" rtlCol="0" anchor="t">
             <a:spAutoFit/>
           </a:bodyPr>
           <a:lstStyle/>
@@ -7261,7 +7271,7 @@
               </a:lnSpc>
             </a:pPr>
             <a:r>
-              <a:rPr lang="en-US" b="true" sz="2340">
+              <a:rPr lang="en-US" sz="2340" b="1">
                 <a:solidFill>
                   <a:srgbClr val="F7F9FC"/>
                 </a:solidFill>
@@ -7273,7 +7283,7 @@
               <a:t>Listings</a:t>
             </a:r>
             <a:r>
-              <a:rPr lang="en-US" b="true" sz="2340">
+              <a:rPr lang="en-US" sz="2340" b="1">
                 <a:solidFill>
                   <a:srgbClr val="000000"/>
                 </a:solidFill>
@@ -7285,7 +7295,7 @@
               <a:t> </a:t>
             </a:r>
             <a:r>
-              <a:rPr lang="en-US" b="true" sz="2340">
+              <a:rPr lang="en-US" sz="2340" b="1">
                 <a:solidFill>
                   <a:srgbClr val="F7F9FC"/>
                 </a:solidFill>
@@ -7297,7 +7307,7 @@
               <a:t>(2–5</a:t>
             </a:r>
             <a:r>
-              <a:rPr lang="en-US" b="true" sz="2340">
+              <a:rPr lang="en-US" sz="2340" b="1">
                 <a:solidFill>
                   <a:srgbClr val="000000"/>
                 </a:solidFill>
@@ -7309,7 +7319,7 @@
               <a:t> </a:t>
             </a:r>
             <a:r>
-              <a:rPr lang="en-US" b="true" sz="2340">
+              <a:rPr lang="en-US" sz="2340" b="1">
                 <a:solidFill>
                   <a:srgbClr val="F7F9FC"/>
                 </a:solidFill>
@@ -7325,12 +7335,12 @@
       </p:sp>
       <p:sp>
         <p:nvSpPr>
-          <p:cNvPr name="TextBox 25" id="25"/>
-          <p:cNvSpPr txBox="true"/>
+          <p:cNvPr id="25" name="TextBox 25"/>
+          <p:cNvSpPr txBox="1"/>
           <p:nvPr/>
         </p:nvSpPr>
         <p:spPr>
-          <a:xfrm rot="0">
+          <a:xfrm>
             <a:off x="13288680" y="5029943"/>
             <a:ext cx="2882656" cy="406860"/>
           </a:xfrm>
@@ -7339,7 +7349,7 @@
           </a:prstGeom>
         </p:spPr>
         <p:txBody>
-          <a:bodyPr anchor="t" rtlCol="false" tIns="0" lIns="0" bIns="0" rIns="0">
+          <a:bodyPr lIns="0" tIns="0" rIns="0" bIns="0" rtlCol="0" anchor="t">
             <a:spAutoFit/>
           </a:bodyPr>
           <a:lstStyle/>
@@ -7350,7 +7360,7 @@
               </a:lnSpc>
             </a:pPr>
             <a:r>
-              <a:rPr lang="en-US" b="true" sz="2340">
+              <a:rPr lang="en-US" sz="2340" b="1">
                 <a:solidFill>
                   <a:srgbClr val="F7F9FC"/>
                 </a:solidFill>
@@ -7362,7 +7372,7 @@
               <a:t>Rivals</a:t>
             </a:r>
             <a:r>
-              <a:rPr lang="en-US" b="true" sz="2340">
+              <a:rPr lang="en-US" sz="2340" b="1">
                 <a:solidFill>
                   <a:srgbClr val="000000"/>
                 </a:solidFill>
@@ -7374,7 +7384,7 @@
               <a:t> </a:t>
             </a:r>
             <a:r>
-              <a:rPr lang="en-US" b="true" sz="2340">
+              <a:rPr lang="en-US" sz="2340" b="1">
                 <a:solidFill>
                   <a:srgbClr val="F7F9FC"/>
                 </a:solidFill>
@@ -7386,7 +7396,7 @@
               <a:t>(300m–2</a:t>
             </a:r>
             <a:r>
-              <a:rPr lang="en-US" b="true" sz="2340">
+              <a:rPr lang="en-US" sz="2340" b="1">
                 <a:solidFill>
                   <a:srgbClr val="000000"/>
                 </a:solidFill>
@@ -7398,7 +7408,7 @@
               <a:t> </a:t>
             </a:r>
             <a:r>
-              <a:rPr lang="en-US" b="true" sz="2340">
+              <a:rPr lang="en-US" sz="2340" b="1">
                 <a:solidFill>
                   <a:srgbClr val="F7F9FC"/>
                 </a:solidFill>
@@ -7421,13 +7431,14 @@
 </file>
 
 <file path=ppt/slides/slide6.xml><?xml version="1.0" encoding="utf-8"?>
-<p:sld xmlns:p="http://schemas.openxmlformats.org/presentationml/2006/main" xmlns:a="http://schemas.openxmlformats.org/drawingml/2006/main" xmlns:r="http://schemas.openxmlformats.org/officeDocument/2006/relationships">
+<p:sld xmlns:a="http://schemas.openxmlformats.org/drawingml/2006/main" xmlns:r="http://schemas.openxmlformats.org/officeDocument/2006/relationships" xmlns:p="http://schemas.openxmlformats.org/presentationml/2006/main">
   <p:cSld>
     <p:bg>
       <p:bgPr>
         <a:solidFill>
           <a:srgbClr val="172B4D"/>
         </a:solidFill>
+        <a:effectLst/>
       </p:bgPr>
     </p:bg>
     <p:spTree>
@@ -7446,12 +7457,12 @@
       </p:grpSpPr>
       <p:grpSp>
         <p:nvGrpSpPr>
-          <p:cNvPr name="Group 2" id="2"/>
+          <p:cNvPr id="2" name="Group 2"/>
           <p:cNvGrpSpPr/>
           <p:nvPr/>
         </p:nvGrpSpPr>
         <p:grpSpPr>
-          <a:xfrm rot="0">
+          <a:xfrm>
             <a:off x="0" y="5412781"/>
             <a:ext cx="9363732" cy="4874219"/>
             <a:chOff x="0" y="0"/>
@@ -7460,12 +7471,12 @@
         </p:grpSpPr>
         <p:sp>
           <p:nvSpPr>
-            <p:cNvPr name="Freeform 3" id="3"/>
+            <p:cNvPr id="3" name="Freeform 3"/>
             <p:cNvSpPr/>
             <p:nvPr/>
           </p:nvSpPr>
           <p:spPr>
-            <a:xfrm flipH="false" flipV="false" rot="0">
+            <a:xfrm>
               <a:off x="0" y="0"/>
               <a:ext cx="12484989" cy="6498971"/>
             </a:xfrm>
@@ -7474,9 +7485,9 @@
               <a:gdLst/>
               <a:ahLst/>
               <a:cxnLst/>
-              <a:rect r="r" b="b" t="t" l="l"/>
+              <a:rect l="l" t="t" r="r" b="b"/>
               <a:pathLst>
-                <a:path h="6498971" w="12484989">
+                <a:path w="12484989" h="6498971">
                   <a:moveTo>
                     <a:pt x="5788914" y="0"/>
                   </a:moveTo>
@@ -7516,7 +7527,7 @@
             <a:blipFill>
               <a:blip r:embed="rId2"/>
               <a:stretch>
-                <a:fillRect l="-7290" t="0" r="-24" b="-3079"/>
+                <a:fillRect l="-7290" r="-24" b="-3079"/>
               </a:stretch>
             </a:blipFill>
           </p:spPr>
@@ -7524,12 +7535,12 @@
       </p:grpSp>
       <p:grpSp>
         <p:nvGrpSpPr>
-          <p:cNvPr name="Group 4" id="4"/>
+          <p:cNvPr id="4" name="Group 4"/>
           <p:cNvGrpSpPr/>
           <p:nvPr/>
         </p:nvGrpSpPr>
         <p:grpSpPr>
-          <a:xfrm rot="0">
+          <a:xfrm>
             <a:off x="1028700" y="1028700"/>
             <a:ext cx="8337328" cy="8147437"/>
             <a:chOff x="0" y="0"/>
@@ -7538,12 +7549,12 @@
         </p:grpSpPr>
         <p:sp>
           <p:nvSpPr>
-            <p:cNvPr name="Freeform 5" id="5"/>
+            <p:cNvPr id="5" name="Freeform 5"/>
             <p:cNvSpPr/>
             <p:nvPr/>
           </p:nvSpPr>
           <p:spPr>
-            <a:xfrm flipH="false" flipV="false" rot="0">
+            <a:xfrm>
               <a:off x="0" y="0"/>
               <a:ext cx="11116437" cy="10863199"/>
             </a:xfrm>
@@ -7552,9 +7563,9 @@
               <a:gdLst/>
               <a:ahLst/>
               <a:cxnLst/>
-              <a:rect r="r" b="b" t="t" l="l"/>
+              <a:rect l="l" t="t" r="r" b="b"/>
               <a:pathLst>
-                <a:path h="10863199" w="11116437">
+                <a:path w="11116437" h="10863199">
                   <a:moveTo>
                     <a:pt x="381000" y="0"/>
                   </a:moveTo>
@@ -7594,7 +7605,7 @@
             <a:blipFill>
               <a:blip r:embed="rId3"/>
               <a:stretch>
-                <a:fillRect l="0" t="-333" r="-12" b="-447"/>
+                <a:fillRect t="-333" r="-12" b="-447"/>
               </a:stretch>
             </a:blipFill>
           </p:spPr>
@@ -7602,12 +7613,12 @@
       </p:grpSp>
       <p:sp>
         <p:nvSpPr>
-          <p:cNvPr name="TextBox 6" id="6"/>
-          <p:cNvSpPr txBox="true"/>
+          <p:cNvPr id="6" name="TextBox 6"/>
+          <p:cNvSpPr txBox="1"/>
           <p:nvPr/>
         </p:nvSpPr>
         <p:spPr>
-          <a:xfrm rot="0">
+          <a:xfrm>
             <a:off x="10396833" y="1700251"/>
             <a:ext cx="6837140" cy="2194922"/>
           </a:xfrm>
@@ -7616,7 +7627,7 @@
           </a:prstGeom>
         </p:spPr>
         <p:txBody>
-          <a:bodyPr anchor="t" rtlCol="false" tIns="0" lIns="0" bIns="0" rIns="0">
+          <a:bodyPr lIns="0" tIns="0" rIns="0" bIns="0" rtlCol="0" anchor="t">
             <a:spAutoFit/>
           </a:bodyPr>
           <a:lstStyle/>
@@ -7627,7 +7638,7 @@
               </a:lnSpc>
             </a:pPr>
             <a:r>
-              <a:rPr lang="en-US" b="true" sz="8493">
+              <a:rPr lang="en-US" sz="8493" b="1">
                 <a:solidFill>
                   <a:srgbClr val="F7F9FC"/>
                 </a:solidFill>
@@ -7646,7 +7657,7 @@
               </a:lnSpc>
             </a:pPr>
             <a:r>
-              <a:rPr lang="en-US" b="true" sz="8493">
+              <a:rPr lang="en-US" sz="8493" b="1">
                 <a:solidFill>
                   <a:srgbClr val="F7F9FC"/>
                 </a:solidFill>
@@ -7662,12 +7673,12 @@
       </p:sp>
       <p:sp>
         <p:nvSpPr>
-          <p:cNvPr name="TextBox 7" id="7"/>
-          <p:cNvSpPr txBox="true"/>
+          <p:cNvPr id="7" name="TextBox 7"/>
+          <p:cNvSpPr txBox="1"/>
           <p:nvPr/>
         </p:nvSpPr>
         <p:spPr>
-          <a:xfrm rot="0">
+          <a:xfrm>
             <a:off x="11397729" y="4072490"/>
             <a:ext cx="82725" cy="425406"/>
           </a:xfrm>
@@ -7676,7 +7687,7 @@
           </a:prstGeom>
         </p:spPr>
         <p:txBody>
-          <a:bodyPr anchor="t" rtlCol="false" tIns="0" lIns="0" bIns="0" rIns="0">
+          <a:bodyPr lIns="0" tIns="0" rIns="0" bIns="0" rtlCol="0" anchor="t">
             <a:spAutoFit/>
           </a:bodyPr>
           <a:lstStyle/>
@@ -7703,12 +7714,12 @@
       </p:sp>
       <p:sp>
         <p:nvSpPr>
-          <p:cNvPr name="TextBox 8" id="8"/>
-          <p:cNvSpPr txBox="true"/>
+          <p:cNvPr id="8" name="TextBox 8"/>
+          <p:cNvSpPr txBox="1"/>
           <p:nvPr/>
         </p:nvSpPr>
         <p:spPr>
-          <a:xfrm rot="0">
+          <a:xfrm>
             <a:off x="10396833" y="4072490"/>
             <a:ext cx="6502679" cy="425406"/>
           </a:xfrm>
@@ -7717,7 +7728,7 @@
           </a:prstGeom>
         </p:spPr>
         <p:txBody>
-          <a:bodyPr anchor="t" rtlCol="false" tIns="0" lIns="0" bIns="0" rIns="0">
+          <a:bodyPr lIns="0" tIns="0" rIns="0" bIns="0" rtlCol="0" anchor="t">
             <a:spAutoFit/>
           </a:bodyPr>
           <a:lstStyle/>
@@ -7744,12 +7755,12 @@
       </p:sp>
       <p:sp>
         <p:nvSpPr>
-          <p:cNvPr name="TextBox 9" id="9"/>
-          <p:cNvSpPr txBox="true"/>
+          <p:cNvPr id="9" name="TextBox 9"/>
+          <p:cNvSpPr txBox="1"/>
           <p:nvPr/>
         </p:nvSpPr>
         <p:spPr>
-          <a:xfrm rot="0">
+          <a:xfrm>
             <a:off x="10396833" y="4510640"/>
             <a:ext cx="7317115" cy="3416256"/>
           </a:xfrm>
@@ -7758,7 +7769,7 @@
           </a:prstGeom>
         </p:spPr>
         <p:txBody>
-          <a:bodyPr anchor="t" rtlCol="false" tIns="0" lIns="0" bIns="0" rIns="0">
+          <a:bodyPr lIns="0" tIns="0" rIns="0" bIns="0" rtlCol="0" anchor="t">
             <a:spAutoFit/>
           </a:bodyPr>
           <a:lstStyle/>
@@ -7792,13 +7803,14 @@
 </file>
 
 <file path=ppt/slides/slide7.xml><?xml version="1.0" encoding="utf-8"?>
-<p:sld xmlns:p="http://schemas.openxmlformats.org/presentationml/2006/main" xmlns:a="http://schemas.openxmlformats.org/drawingml/2006/main" xmlns:r="http://schemas.openxmlformats.org/officeDocument/2006/relationships">
+<p:sld xmlns:a="http://schemas.openxmlformats.org/drawingml/2006/main" xmlns:r="http://schemas.openxmlformats.org/officeDocument/2006/relationships" xmlns:p="http://schemas.openxmlformats.org/presentationml/2006/main">
   <p:cSld>
     <p:bg>
       <p:bgPr>
         <a:solidFill>
           <a:srgbClr val="172B4D"/>
         </a:solidFill>
+        <a:effectLst/>
       </p:bgPr>
     </p:bg>
     <p:spTree>
@@ -7817,12 +7829,12 @@
       </p:grpSpPr>
       <p:grpSp>
         <p:nvGrpSpPr>
-          <p:cNvPr name="Group 2" id="2"/>
+          <p:cNvPr id="2" name="Group 2"/>
           <p:cNvGrpSpPr/>
           <p:nvPr/>
         </p:nvGrpSpPr>
         <p:grpSpPr>
-          <a:xfrm rot="0">
+          <a:xfrm>
             <a:off x="0" y="5412781"/>
             <a:ext cx="9363732" cy="4874219"/>
             <a:chOff x="0" y="0"/>
@@ -7831,12 +7843,12 @@
         </p:grpSpPr>
         <p:sp>
           <p:nvSpPr>
-            <p:cNvPr name="Freeform 3" id="3"/>
+            <p:cNvPr id="3" name="Freeform 3"/>
             <p:cNvSpPr/>
             <p:nvPr/>
           </p:nvSpPr>
           <p:spPr>
-            <a:xfrm flipH="false" flipV="false" rot="0">
+            <a:xfrm>
               <a:off x="0" y="0"/>
               <a:ext cx="12484989" cy="6498971"/>
             </a:xfrm>
@@ -7845,9 +7857,9 @@
               <a:gdLst/>
               <a:ahLst/>
               <a:cxnLst/>
-              <a:rect r="r" b="b" t="t" l="l"/>
+              <a:rect l="l" t="t" r="r" b="b"/>
               <a:pathLst>
-                <a:path h="6498971" w="12484989">
+                <a:path w="12484989" h="6498971">
                   <a:moveTo>
                     <a:pt x="5788914" y="0"/>
                   </a:moveTo>
@@ -7887,7 +7899,7 @@
             <a:blipFill>
               <a:blip r:embed="rId2"/>
               <a:stretch>
-                <a:fillRect l="-7290" t="0" r="-24" b="-3079"/>
+                <a:fillRect l="-7290" r="-24" b="-3079"/>
               </a:stretch>
             </a:blipFill>
           </p:spPr>
@@ -7895,12 +7907,12 @@
       </p:grpSp>
       <p:sp>
         <p:nvSpPr>
-          <p:cNvPr name="Freeform 4" id="4"/>
+          <p:cNvPr id="4" name="Freeform 4"/>
           <p:cNvSpPr/>
           <p:nvPr/>
         </p:nvSpPr>
         <p:spPr>
-          <a:xfrm flipH="false" flipV="false" rot="0">
+          <a:xfrm>
             <a:off x="0" y="0"/>
             <a:ext cx="5192686" cy="10287000"/>
           </a:xfrm>
@@ -7909,9 +7921,9 @@
             <a:gdLst/>
             <a:ahLst/>
             <a:cxnLst/>
-            <a:rect r="r" b="b" t="t" l="l"/>
+            <a:rect l="l" t="t" r="r" b="b"/>
             <a:pathLst>
-              <a:path h="10287000" w="5192686">
+              <a:path w="5192686" h="10287000">
                 <a:moveTo>
                   <a:pt x="0" y="0"/>
                 </a:moveTo>
@@ -7934,19 +7946,19 @@
           <a:blipFill>
             <a:blip r:embed="rId3"/>
             <a:stretch>
-              <a:fillRect l="-640" t="0" r="-640" b="0"/>
+              <a:fillRect l="-640" r="-640"/>
             </a:stretch>
           </a:blipFill>
         </p:spPr>
       </p:sp>
       <p:sp>
         <p:nvSpPr>
-          <p:cNvPr name="Freeform 5" id="5"/>
+          <p:cNvPr id="5" name="Freeform 5"/>
           <p:cNvSpPr/>
           <p:nvPr/>
         </p:nvSpPr>
         <p:spPr>
-          <a:xfrm flipH="false" flipV="false" rot="0">
+          <a:xfrm>
             <a:off x="13022289" y="0"/>
             <a:ext cx="5265711" cy="10287000"/>
           </a:xfrm>
@@ -7955,9 +7967,9 @@
             <a:gdLst/>
             <a:ahLst/>
             <a:cxnLst/>
-            <a:rect r="r" b="b" t="t" l="l"/>
+            <a:rect l="l" t="t" r="r" b="b"/>
             <a:pathLst>
-              <a:path h="10287000" w="5265711">
+              <a:path w="5265711" h="10287000">
                 <a:moveTo>
                   <a:pt x="0" y="0"/>
                 </a:moveTo>
@@ -7980,20 +7992,20 @@
           <a:blipFill>
             <a:blip r:embed="rId4"/>
             <a:stretch>
-              <a:fillRect l="-6243" t="0" r="-5870" b="0"/>
+              <a:fillRect l="-6243" r="-5870"/>
             </a:stretch>
           </a:blipFill>
         </p:spPr>
       </p:sp>
       <p:sp>
         <p:nvSpPr>
-          <p:cNvPr name="TextBox 6" id="6"/>
-          <p:cNvSpPr txBox="true"/>
+          <p:cNvPr id="6" name="TextBox 6"/>
+          <p:cNvSpPr txBox="1"/>
           <p:nvPr/>
         </p:nvSpPr>
         <p:spPr>
-          <a:xfrm rot="0">
-            <a:off x="5448930" y="3331638"/>
+          <a:xfrm>
+            <a:off x="5638628" y="3401707"/>
             <a:ext cx="7317115" cy="1341565"/>
           </a:xfrm>
           <a:prstGeom prst="rect">
@@ -8001,7 +8013,7 @@
           </a:prstGeom>
         </p:spPr>
         <p:txBody>
-          <a:bodyPr anchor="t" rtlCol="false" tIns="0" lIns="0" bIns="0" rIns="0">
+          <a:bodyPr lIns="0" tIns="0" rIns="0" bIns="0" rtlCol="0" anchor="t">
             <a:spAutoFit/>
           </a:bodyPr>
           <a:lstStyle/>
@@ -8012,7 +8024,7 @@
               </a:lnSpc>
             </a:pPr>
             <a:r>
-              <a:rPr lang="en-US" b="true" sz="3500">
+              <a:rPr lang="en-US" sz="3500" b="1" dirty="0">
                 <a:solidFill>
                   <a:srgbClr val="F7F9FC"/>
                 </a:solidFill>
@@ -8021,19 +8033,7 @@
                 <a:cs typeface="Montserrat Bold"/>
                 <a:sym typeface="Montserrat Bold"/>
               </a:rPr>
-              <a:t>Street S</a:t>
-            </a:r>
-            <a:r>
-              <a:rPr lang="en-US" b="true" sz="3500">
-                <a:solidFill>
-                  <a:srgbClr val="F7F9FC"/>
-                </a:solidFill>
-                <a:latin typeface="Montserrat Bold"/>
-                <a:ea typeface="Montserrat Bold"/>
-                <a:cs typeface="Montserrat Bold"/>
-                <a:sym typeface="Montserrat Bold"/>
-              </a:rPr>
-              <a:t>can – Ground-Level Validation</a:t>
+              <a:t>Street Scan – Ground-Level Validation</a:t>
             </a:r>
           </a:p>
           <a:p>
@@ -8042,17 +8042,26 @@
                 <a:spcPts val="3461"/>
               </a:lnSpc>
             </a:pPr>
-          </a:p>
-        </p:txBody>
-      </p:sp>
-      <p:sp>
-        <p:nvSpPr>
-          <p:cNvPr name="TextBox 7" id="7"/>
-          <p:cNvSpPr txBox="true"/>
+            <a:endParaRPr lang="en-US" sz="3500" b="1" dirty="0">
+              <a:solidFill>
+                <a:srgbClr val="F7F9FC"/>
+              </a:solidFill>
+              <a:latin typeface="Montserrat Bold"/>
+              <a:ea typeface="Montserrat Bold"/>
+              <a:cs typeface="Montserrat Bold"/>
+              <a:sym typeface="Montserrat Bold"/>
+            </a:endParaRPr>
+          </a:p>
+        </p:txBody>
+      </p:sp>
+      <p:sp>
+        <p:nvSpPr>
+          <p:cNvPr id="7" name="TextBox 7"/>
+          <p:cNvSpPr txBox="1"/>
           <p:nvPr/>
         </p:nvSpPr>
         <p:spPr>
-          <a:xfrm rot="0">
+          <a:xfrm>
             <a:off x="10202704" y="4072490"/>
             <a:ext cx="82725" cy="425406"/>
           </a:xfrm>
@@ -8061,7 +8070,7 @@
           </a:prstGeom>
         </p:spPr>
         <p:txBody>
-          <a:bodyPr anchor="t" rtlCol="false" tIns="0" lIns="0" bIns="0" rIns="0">
+          <a:bodyPr lIns="0" tIns="0" rIns="0" bIns="0" rtlCol="0" anchor="t">
             <a:spAutoFit/>
           </a:bodyPr>
           <a:lstStyle/>
@@ -8088,26 +8097,26 @@
       </p:sp>
       <p:sp>
         <p:nvSpPr>
-          <p:cNvPr name="TextBox 8" id="8"/>
-          <p:cNvSpPr txBox="true"/>
+          <p:cNvPr id="8" name="TextBox 8"/>
+          <p:cNvSpPr txBox="1"/>
           <p:nvPr/>
         </p:nvSpPr>
         <p:spPr>
-          <a:xfrm rot="0">
+          <a:xfrm>
             <a:off x="5382384" y="4459796"/>
-            <a:ext cx="7383661" cy="2325370"/>
+            <a:ext cx="7383661" cy="2756204"/>
           </a:xfrm>
           <a:prstGeom prst="rect">
             <a:avLst/>
           </a:prstGeom>
         </p:spPr>
         <p:txBody>
-          <a:bodyPr anchor="t" rtlCol="false" tIns="0" lIns="0" bIns="0" rIns="0">
+          <a:bodyPr lIns="0" tIns="0" rIns="0" bIns="0" rtlCol="0" anchor="t">
             <a:spAutoFit/>
           </a:bodyPr>
           <a:lstStyle/>
           <a:p>
-            <a:pPr algn="l" marL="474979" indent="-237490" lvl="1">
+            <a:pPr marL="474979" lvl="1" indent="-237490" algn="l">
               <a:lnSpc>
                 <a:spcPts val="3079"/>
               </a:lnSpc>
@@ -8115,7 +8124,7 @@
               <a:buChar char="•"/>
             </a:pPr>
             <a:r>
-              <a:rPr lang="en-US" sz="2199">
+              <a:rPr lang="en-US" sz="2199" dirty="0">
                 <a:solidFill>
                   <a:srgbClr val="F7F9FC"/>
                 </a:solidFill>
@@ -8124,11 +8133,32 @@
                 <a:cs typeface="Open Sans"/>
                 <a:sym typeface="Open Sans"/>
               </a:rPr>
-              <a:t>Upload 30–60 second street videos.</a:t>
-            </a:r>
-          </a:p>
-          <a:p>
-            <a:pPr algn="l" marL="474979" indent="-237490" lvl="1">
+              <a:t>Upload 30–60 second street videos or At least 5 images about </a:t>
+            </a:r>
+            <a:r>
+              <a:rPr lang="en-US" sz="2199">
+                <a:solidFill>
+                  <a:srgbClr val="F7F9FC"/>
+                </a:solidFill>
+                <a:latin typeface="Open Sans"/>
+                <a:ea typeface="Open Sans"/>
+                <a:cs typeface="Open Sans"/>
+                <a:sym typeface="Open Sans"/>
+              </a:rPr>
+              <a:t>the surroundings.</a:t>
+            </a:r>
+            <a:endParaRPr lang="en-US" sz="2199" dirty="0">
+              <a:solidFill>
+                <a:srgbClr val="F7F9FC"/>
+              </a:solidFill>
+              <a:latin typeface="Open Sans"/>
+              <a:ea typeface="Open Sans"/>
+              <a:cs typeface="Open Sans"/>
+              <a:sym typeface="Open Sans"/>
+            </a:endParaRPr>
+          </a:p>
+          <a:p>
+            <a:pPr marL="474979" lvl="1" indent="-237490" algn="l">
               <a:lnSpc>
                 <a:spcPts val="3079"/>
               </a:lnSpc>
@@ -8136,7 +8166,7 @@
               <a:buChar char="•"/>
             </a:pPr>
             <a:r>
-              <a:rPr lang="en-US" sz="2199">
+              <a:rPr lang="en-US" sz="2199" dirty="0">
                 <a:solidFill>
                   <a:srgbClr val="F7F9FC"/>
                 </a:solidFill>
@@ -8149,7 +8179,7 @@
             </a:r>
           </a:p>
           <a:p>
-            <a:pPr algn="l" marL="474979" indent="-237490" lvl="1">
+            <a:pPr marL="474979" lvl="1" indent="-237490" algn="l">
               <a:lnSpc>
                 <a:spcPts val="3079"/>
               </a:lnSpc>
@@ -8157,7 +8187,7 @@
               <a:buChar char="•"/>
             </a:pPr>
             <a:r>
-              <a:rPr lang="en-US" sz="2199">
+              <a:rPr lang="en-US" sz="2199" dirty="0">
                 <a:solidFill>
                   <a:srgbClr val="F7F9FC"/>
                 </a:solidFill>
@@ -8170,7 +8200,7 @@
             </a:r>
           </a:p>
           <a:p>
-            <a:pPr algn="l" marL="474979" indent="-237490" lvl="1">
+            <a:pPr marL="474979" lvl="1" indent="-237490" algn="l">
               <a:lnSpc>
                 <a:spcPts val="3079"/>
               </a:lnSpc>
@@ -8178,7 +8208,7 @@
               <a:buChar char="•"/>
             </a:pPr>
             <a:r>
-              <a:rPr lang="en-US" sz="2199">
+              <a:rPr lang="en-US" sz="2199" dirty="0">
                 <a:solidFill>
                   <a:srgbClr val="F7F9FC"/>
                 </a:solidFill>
@@ -8191,7 +8221,7 @@
             </a:r>
           </a:p>
           <a:p>
-            <a:pPr algn="l" marL="474979" indent="-237490" lvl="1">
+            <a:pPr marL="474979" lvl="1" indent="-237490" algn="l">
               <a:lnSpc>
                 <a:spcPts val="3079"/>
               </a:lnSpc>
@@ -8199,7 +8229,7 @@
               <a:buChar char="•"/>
             </a:pPr>
             <a:r>
-              <a:rPr lang="en-US" sz="2199">
+              <a:rPr lang="en-US" sz="2199" dirty="0">
                 <a:solidFill>
                   <a:srgbClr val="F7F9FC"/>
                 </a:solidFill>
@@ -8217,6 +8247,15 @@
                 <a:spcPts val="3079"/>
               </a:lnSpc>
             </a:pPr>
+            <a:endParaRPr lang="en-US" sz="2199" dirty="0">
+              <a:solidFill>
+                <a:srgbClr val="F7F9FC"/>
+              </a:solidFill>
+              <a:latin typeface="Open Sans"/>
+              <a:ea typeface="Open Sans"/>
+              <a:cs typeface="Open Sans"/>
+              <a:sym typeface="Open Sans"/>
+            </a:endParaRPr>
           </a:p>
         </p:txBody>
       </p:sp>
@@ -8229,13 +8268,14 @@
 </file>
 
 <file path=ppt/slides/slide8.xml><?xml version="1.0" encoding="utf-8"?>
-<p:sld xmlns:p="http://schemas.openxmlformats.org/presentationml/2006/main" xmlns:a="http://schemas.openxmlformats.org/drawingml/2006/main" xmlns:r="http://schemas.openxmlformats.org/officeDocument/2006/relationships">
+<p:sld xmlns:a="http://schemas.openxmlformats.org/drawingml/2006/main" xmlns:r="http://schemas.openxmlformats.org/officeDocument/2006/relationships" xmlns:p="http://schemas.openxmlformats.org/presentationml/2006/main">
   <p:cSld>
     <p:bg>
       <p:bgPr>
         <a:solidFill>
           <a:srgbClr val="172B4D"/>
         </a:solidFill>
+        <a:effectLst/>
       </p:bgPr>
     </p:bg>
     <p:spTree>
@@ -8254,12 +8294,12 @@
       </p:grpSpPr>
       <p:grpSp>
         <p:nvGrpSpPr>
-          <p:cNvPr name="Group 2" id="2"/>
+          <p:cNvPr id="2" name="Group 2"/>
           <p:cNvGrpSpPr/>
           <p:nvPr/>
         </p:nvGrpSpPr>
         <p:grpSpPr>
-          <a:xfrm rot="0">
+          <a:xfrm>
             <a:off x="0" y="5412781"/>
             <a:ext cx="9363732" cy="4874219"/>
             <a:chOff x="0" y="0"/>
@@ -8268,12 +8308,12 @@
         </p:grpSpPr>
         <p:sp>
           <p:nvSpPr>
-            <p:cNvPr name="Freeform 3" id="3"/>
+            <p:cNvPr id="3" name="Freeform 3"/>
             <p:cNvSpPr/>
             <p:nvPr/>
           </p:nvSpPr>
           <p:spPr>
-            <a:xfrm flipH="false" flipV="false" rot="0">
+            <a:xfrm>
               <a:off x="0" y="0"/>
               <a:ext cx="12484989" cy="6498971"/>
             </a:xfrm>
@@ -8282,9 +8322,9 @@
               <a:gdLst/>
               <a:ahLst/>
               <a:cxnLst/>
-              <a:rect r="r" b="b" t="t" l="l"/>
+              <a:rect l="l" t="t" r="r" b="b"/>
               <a:pathLst>
-                <a:path h="6498971" w="12484989">
+                <a:path w="12484989" h="6498971">
                   <a:moveTo>
                     <a:pt x="5788914" y="0"/>
                   </a:moveTo>
@@ -8324,7 +8364,7 @@
             <a:blipFill>
               <a:blip r:embed="rId2"/>
               <a:stretch>
-                <a:fillRect l="-7290" t="0" r="-24" b="-3079"/>
+                <a:fillRect l="-7290" r="-24" b="-3079"/>
               </a:stretch>
             </a:blipFill>
           </p:spPr>
@@ -8332,12 +8372,12 @@
       </p:grpSp>
       <p:grpSp>
         <p:nvGrpSpPr>
-          <p:cNvPr name="Group 4" id="4"/>
+          <p:cNvPr id="4" name="Group 4"/>
           <p:cNvGrpSpPr/>
           <p:nvPr/>
         </p:nvGrpSpPr>
         <p:grpSpPr>
-          <a:xfrm rot="0">
+          <a:xfrm>
             <a:off x="485651" y="903684"/>
             <a:ext cx="9715500" cy="8696325"/>
             <a:chOff x="0" y="0"/>
@@ -8346,12 +8386,12 @@
         </p:grpSpPr>
         <p:sp>
           <p:nvSpPr>
-            <p:cNvPr name="Freeform 5" id="5"/>
+            <p:cNvPr id="5" name="Freeform 5"/>
             <p:cNvSpPr/>
             <p:nvPr/>
           </p:nvSpPr>
           <p:spPr>
-            <a:xfrm flipH="false" flipV="false" rot="0">
+            <a:xfrm>
               <a:off x="0" y="0"/>
               <a:ext cx="12953873" cy="11595100"/>
             </a:xfrm>
@@ -8360,9 +8400,9 @@
               <a:gdLst/>
               <a:ahLst/>
               <a:cxnLst/>
-              <a:rect r="r" b="b" t="t" l="l"/>
+              <a:rect l="l" t="t" r="r" b="b"/>
               <a:pathLst>
-                <a:path h="11595100" w="12953873">
+                <a:path w="12953873" h="11595100">
                   <a:moveTo>
                     <a:pt x="254000" y="0"/>
                   </a:moveTo>
@@ -8402,7 +8442,7 @@
             <a:blipFill>
               <a:blip r:embed="rId3"/>
               <a:stretch>
-                <a:fillRect l="-30547" t="0" r="-30532" b="0"/>
+                <a:fillRect l="-30547" r="-30532"/>
               </a:stretch>
             </a:blipFill>
           </p:spPr>
@@ -8410,12 +8450,12 @@
       </p:grpSp>
       <p:sp>
         <p:nvSpPr>
-          <p:cNvPr name="TextBox 6" id="6"/>
-          <p:cNvSpPr txBox="true"/>
+          <p:cNvPr id="6" name="TextBox 6"/>
+          <p:cNvSpPr txBox="1"/>
           <p:nvPr/>
         </p:nvSpPr>
         <p:spPr>
-          <a:xfrm rot="0">
+          <a:xfrm>
             <a:off x="10396833" y="1700251"/>
             <a:ext cx="4980965" cy="2194922"/>
           </a:xfrm>
@@ -8424,7 +8464,7 @@
           </a:prstGeom>
         </p:spPr>
         <p:txBody>
-          <a:bodyPr anchor="t" rtlCol="false" tIns="0" lIns="0" bIns="0" rIns="0">
+          <a:bodyPr lIns="0" tIns="0" rIns="0" bIns="0" rtlCol="0" anchor="t">
             <a:spAutoFit/>
           </a:bodyPr>
           <a:lstStyle/>
@@ -8435,7 +8475,7 @@
               </a:lnSpc>
             </a:pPr>
             <a:r>
-              <a:rPr lang="en-US" b="true" sz="8493">
+              <a:rPr lang="en-US" sz="8493" b="1">
                 <a:solidFill>
                   <a:srgbClr val="F7F9FC"/>
                 </a:solidFill>
@@ -8454,7 +8494,7 @@
               </a:lnSpc>
             </a:pPr>
             <a:r>
-              <a:rPr lang="en-US" b="true" sz="8493">
+              <a:rPr lang="en-US" sz="8493" b="1">
                 <a:solidFill>
                   <a:srgbClr val="F7F9FC"/>
                 </a:solidFill>
@@ -8470,12 +8510,12 @@
       </p:sp>
       <p:sp>
         <p:nvSpPr>
-          <p:cNvPr name="TextBox 7" id="7"/>
-          <p:cNvSpPr txBox="true"/>
+          <p:cNvPr id="7" name="TextBox 7"/>
+          <p:cNvSpPr txBox="1"/>
           <p:nvPr/>
         </p:nvSpPr>
         <p:spPr>
-          <a:xfrm rot="0">
+          <a:xfrm>
             <a:off x="11397729" y="3911756"/>
             <a:ext cx="82725" cy="425406"/>
           </a:xfrm>
@@ -8484,7 +8524,7 @@
           </a:prstGeom>
         </p:spPr>
         <p:txBody>
-          <a:bodyPr anchor="t" rtlCol="false" tIns="0" lIns="0" bIns="0" rIns="0">
+          <a:bodyPr lIns="0" tIns="0" rIns="0" bIns="0" rtlCol="0" anchor="t">
             <a:spAutoFit/>
           </a:bodyPr>
           <a:lstStyle/>
@@ -8511,12 +8551,12 @@
       </p:sp>
       <p:sp>
         <p:nvSpPr>
-          <p:cNvPr name="TextBox 8" id="8"/>
-          <p:cNvSpPr txBox="true"/>
+          <p:cNvPr id="8" name="TextBox 8"/>
+          <p:cNvSpPr txBox="1"/>
           <p:nvPr/>
         </p:nvSpPr>
         <p:spPr>
-          <a:xfrm rot="0">
+          <a:xfrm>
             <a:off x="10396833" y="3911756"/>
             <a:ext cx="7197881" cy="425406"/>
           </a:xfrm>
@@ -8525,7 +8565,7 @@
           </a:prstGeom>
         </p:spPr>
         <p:txBody>
-          <a:bodyPr anchor="t" rtlCol="false" tIns="0" lIns="0" bIns="0" rIns="0">
+          <a:bodyPr lIns="0" tIns="0" rIns="0" bIns="0" rtlCol="0" anchor="t">
             <a:spAutoFit/>
           </a:bodyPr>
           <a:lstStyle/>
@@ -8552,12 +8592,12 @@
       </p:sp>
       <p:sp>
         <p:nvSpPr>
-          <p:cNvPr name="TextBox 9" id="9"/>
-          <p:cNvSpPr txBox="true"/>
+          <p:cNvPr id="9" name="TextBox 9"/>
+          <p:cNvSpPr txBox="1"/>
           <p:nvPr/>
         </p:nvSpPr>
         <p:spPr>
-          <a:xfrm rot="0">
+          <a:xfrm>
             <a:off x="10396833" y="4349906"/>
             <a:ext cx="7080647" cy="3844881"/>
           </a:xfrm>
@@ -8566,7 +8606,7 @@
           </a:prstGeom>
         </p:spPr>
         <p:txBody>
-          <a:bodyPr anchor="t" rtlCol="false" tIns="0" lIns="0" bIns="0" rIns="0">
+          <a:bodyPr lIns="0" tIns="0" rIns="0" bIns="0" rtlCol="0" anchor="t">
             <a:spAutoFit/>
           </a:bodyPr>
           <a:lstStyle/>
@@ -8600,13 +8640,14 @@
 </file>
 
 <file path=ppt/slides/slide9.xml><?xml version="1.0" encoding="utf-8"?>
-<p:sld xmlns:p="http://schemas.openxmlformats.org/presentationml/2006/main" xmlns:a="http://schemas.openxmlformats.org/drawingml/2006/main" xmlns:r="http://schemas.openxmlformats.org/officeDocument/2006/relationships">
+<p:sld xmlns:a="http://schemas.openxmlformats.org/drawingml/2006/main" xmlns:r="http://schemas.openxmlformats.org/officeDocument/2006/relationships" xmlns:p="http://schemas.openxmlformats.org/presentationml/2006/main">
   <p:cSld>
     <p:bg>
       <p:bgPr>
         <a:solidFill>
           <a:srgbClr val="172B4D"/>
         </a:solidFill>
+        <a:effectLst/>
       </p:bgPr>
     </p:bg>
     <p:spTree>
@@ -8625,12 +8666,12 @@
       </p:grpSpPr>
       <p:grpSp>
         <p:nvGrpSpPr>
-          <p:cNvPr name="Group 2" id="2"/>
+          <p:cNvPr id="2" name="Group 2"/>
           <p:cNvGrpSpPr/>
           <p:nvPr/>
         </p:nvGrpSpPr>
         <p:grpSpPr>
-          <a:xfrm rot="0">
+          <a:xfrm>
             <a:off x="0" y="3684146"/>
             <a:ext cx="13205698" cy="6602854"/>
             <a:chOff x="0" y="0"/>
@@ -8639,12 +8680,12 @@
         </p:grpSpPr>
         <p:sp>
           <p:nvSpPr>
-            <p:cNvPr name="Freeform 3" id="3"/>
+            <p:cNvPr id="3" name="Freeform 3"/>
             <p:cNvSpPr/>
             <p:nvPr/>
           </p:nvSpPr>
           <p:spPr>
-            <a:xfrm flipH="false" flipV="false" rot="0">
+            <a:xfrm>
               <a:off x="0" y="0"/>
               <a:ext cx="17607535" cy="8803767"/>
             </a:xfrm>
@@ -8653,9 +8694,9 @@
               <a:gdLst/>
               <a:ahLst/>
               <a:cxnLst/>
-              <a:rect r="r" b="b" t="t" l="l"/>
+              <a:rect l="l" t="t" r="r" b="b"/>
               <a:pathLst>
-                <a:path h="8803767" w="17607535">
+                <a:path w="17607535" h="8803767">
                   <a:moveTo>
                     <a:pt x="8795639" y="0"/>
                   </a:moveTo>
@@ -8692,7 +8733,7 @@
             <a:blipFill>
               <a:blip r:embed="rId2"/>
               <a:stretch>
-                <a:fillRect l="0" t="0" r="0" b="0"/>
+                <a:fillRect/>
               </a:stretch>
             </a:blipFill>
           </p:spPr>
@@ -8700,12 +8741,12 @@
       </p:grpSp>
       <p:grpSp>
         <p:nvGrpSpPr>
-          <p:cNvPr name="Group 4" id="4"/>
+          <p:cNvPr id="4" name="Group 4"/>
           <p:cNvGrpSpPr/>
           <p:nvPr/>
         </p:nvGrpSpPr>
         <p:grpSpPr>
-          <a:xfrm rot="0">
+          <a:xfrm>
             <a:off x="11045047" y="3684146"/>
             <a:ext cx="7242953" cy="6602063"/>
             <a:chOff x="0" y="0"/>
@@ -8714,12 +8755,12 @@
         </p:grpSpPr>
         <p:sp>
           <p:nvSpPr>
-            <p:cNvPr name="Freeform 5" id="5"/>
+            <p:cNvPr id="5" name="Freeform 5"/>
             <p:cNvSpPr/>
             <p:nvPr/>
           </p:nvSpPr>
           <p:spPr>
-            <a:xfrm flipH="false" flipV="false" rot="0">
+            <a:xfrm>
               <a:off x="0" y="0"/>
               <a:ext cx="9657334" cy="8802751"/>
             </a:xfrm>
@@ -8728,9 +8769,9 @@
               <a:gdLst/>
               <a:ahLst/>
               <a:cxnLst/>
-              <a:rect r="r" b="b" t="t" l="l"/>
+              <a:rect l="l" t="t" r="r" b="b"/>
               <a:pathLst>
-                <a:path h="8802751" w="9657334">
+                <a:path w="9657334" h="8802751">
                   <a:moveTo>
                     <a:pt x="4831207" y="0"/>
                   </a:moveTo>
@@ -8775,7 +8816,7 @@
             <a:blipFill>
               <a:blip r:embed="rId3"/>
               <a:stretch>
-                <a:fillRect l="0" t="-11" r="-64" b="0"/>
+                <a:fillRect t="-11" r="-64"/>
               </a:stretch>
             </a:blipFill>
           </p:spPr>
@@ -8783,12 +8824,12 @@
       </p:grpSp>
       <p:grpSp>
         <p:nvGrpSpPr>
-          <p:cNvPr name="Group 6" id="6"/>
+          <p:cNvPr id="6" name="Group 6"/>
           <p:cNvGrpSpPr/>
           <p:nvPr/>
         </p:nvGrpSpPr>
         <p:grpSpPr>
-          <a:xfrm rot="0">
+          <a:xfrm>
             <a:off x="1028700" y="1028700"/>
             <a:ext cx="684590" cy="684590"/>
             <a:chOff x="0" y="0"/>
@@ -8797,12 +8838,12 @@
         </p:grpSpPr>
         <p:sp>
           <p:nvSpPr>
-            <p:cNvPr name="Freeform 7" id="7"/>
+            <p:cNvPr id="7" name="Freeform 7"/>
             <p:cNvSpPr/>
             <p:nvPr/>
           </p:nvSpPr>
           <p:spPr>
-            <a:xfrm flipH="false" flipV="false" rot="0">
+            <a:xfrm>
               <a:off x="0" y="0"/>
               <a:ext cx="912749" cy="912749"/>
             </a:xfrm>
@@ -8811,9 +8852,9 @@
               <a:gdLst/>
               <a:ahLst/>
               <a:cxnLst/>
-              <a:rect r="r" b="b" t="t" l="l"/>
+              <a:rect l="l" t="t" r="r" b="b"/>
               <a:pathLst>
-                <a:path h="912749" w="912749">
+                <a:path w="912749" h="912749">
                   <a:moveTo>
                     <a:pt x="455803" y="0"/>
                   </a:moveTo>
@@ -8847,7 +8888,7 @@
             <a:blipFill>
               <a:blip r:embed="rId4"/>
               <a:stretch>
-                <a:fillRect l="0" t="0" r="-4" b="-4"/>
+                <a:fillRect r="-4" b="-4"/>
               </a:stretch>
             </a:blipFill>
           </p:spPr>
@@ -8855,12 +8896,12 @@
       </p:grpSp>
       <p:sp>
         <p:nvSpPr>
-          <p:cNvPr name="Freeform 8" id="8"/>
+          <p:cNvPr id="8" name="Freeform 8"/>
           <p:cNvSpPr/>
           <p:nvPr/>
         </p:nvSpPr>
         <p:spPr>
-          <a:xfrm flipH="false" flipV="false" rot="0">
+          <a:xfrm>
             <a:off x="4707226" y="1278922"/>
             <a:ext cx="12615577" cy="155572"/>
           </a:xfrm>
@@ -8869,9 +8910,9 @@
             <a:gdLst/>
             <a:ahLst/>
             <a:cxnLst/>
-            <a:rect r="r" b="b" t="t" l="l"/>
+            <a:rect l="l" t="t" r="r" b="b"/>
             <a:pathLst>
-              <a:path h="155572" w="12615577">
+              <a:path w="12615577" h="155572">
                 <a:moveTo>
                   <a:pt x="0" y="0"/>
                 </a:moveTo>
@@ -8892,27 +8933,27 @@
             </a:pathLst>
           </a:custGeom>
           <a:blipFill>
-            <a:blip r:embed="rId5">
+            <a:blip>
               <a:extLst>
                 <a:ext uri="{96DAC541-7B7A-43D3-8B79-37D633B846F1}">
-                  <asvg:svgBlip xmlns:asvg="http://schemas.microsoft.com/office/drawing/2016/SVG/main" r:embed="rId6"/>
+                  <asvg:svgBlip xmlns:asvg="http://schemas.microsoft.com/office/drawing/2016/SVG/main" r:embed="rId5"/>
                 </a:ext>
               </a:extLst>
             </a:blip>
             <a:stretch>
-              <a:fillRect l="0" t="0" r="0" b="0"/>
+              <a:fillRect/>
             </a:stretch>
           </a:blipFill>
         </p:spPr>
       </p:sp>
       <p:sp>
         <p:nvSpPr>
-          <p:cNvPr name="TextBox 9" id="9"/>
-          <p:cNvSpPr txBox="true"/>
+          <p:cNvPr id="9" name="TextBox 9"/>
+          <p:cNvSpPr txBox="1"/>
           <p:nvPr/>
         </p:nvSpPr>
         <p:spPr>
-          <a:xfrm rot="0">
+          <a:xfrm>
             <a:off x="1028700" y="2931624"/>
             <a:ext cx="8068770" cy="3726228"/>
           </a:xfrm>
@@ -8921,7 +8962,7 @@
           </a:prstGeom>
         </p:spPr>
         <p:txBody>
-          <a:bodyPr anchor="t" rtlCol="false" tIns="0" lIns="0" bIns="0" rIns="0">
+          <a:bodyPr lIns="0" tIns="0" rIns="0" bIns="0" rtlCol="0" anchor="t">
             <a:spAutoFit/>
           </a:bodyPr>
           <a:lstStyle/>
@@ -8932,7 +8973,7 @@
               </a:lnSpc>
             </a:pPr>
             <a:r>
-              <a:rPr lang="en-US" b="true" sz="7364">
+              <a:rPr lang="en-US" sz="7364" b="1">
                 <a:solidFill>
                   <a:srgbClr val="F7F9FC"/>
                 </a:solidFill>
@@ -8951,7 +8992,7 @@
               </a:lnSpc>
             </a:pPr>
             <a:r>
-              <a:rPr lang="en-US" b="true" sz="6758">
+              <a:rPr lang="en-US" sz="6758" b="1">
                 <a:solidFill>
                   <a:srgbClr val="F7F9FC"/>
                 </a:solidFill>
@@ -8967,12 +9008,12 @@
       </p:sp>
       <p:sp>
         <p:nvSpPr>
-          <p:cNvPr name="TextBox 10" id="10"/>
-          <p:cNvSpPr txBox="true"/>
+          <p:cNvPr id="10" name="TextBox 10"/>
+          <p:cNvSpPr txBox="1"/>
           <p:nvPr/>
         </p:nvSpPr>
         <p:spPr>
-          <a:xfrm rot="0">
+          <a:xfrm>
             <a:off x="2112769" y="1128084"/>
             <a:ext cx="1483385" cy="441074"/>
           </a:xfrm>
@@ -8981,7 +9022,7 @@
           </a:prstGeom>
         </p:spPr>
         <p:txBody>
-          <a:bodyPr anchor="t" rtlCol="false" tIns="0" lIns="0" bIns="0" rIns="0">
+          <a:bodyPr lIns="0" tIns="0" rIns="0" bIns="0" rtlCol="0" anchor="t">
             <a:spAutoFit/>
           </a:bodyPr>
           <a:lstStyle/>
@@ -8992,7 +9033,7 @@
               </a:lnSpc>
             </a:pPr>
             <a:r>
-              <a:rPr lang="en-US" b="true" sz="2497">
+              <a:rPr lang="en-US" sz="2497" b="1">
                 <a:solidFill>
                   <a:srgbClr val="F7F9FC"/>
                 </a:solidFill>
@@ -9008,12 +9049,12 @@
       </p:sp>
       <p:sp>
         <p:nvSpPr>
-          <p:cNvPr name="TextBox 11" id="11"/>
-          <p:cNvSpPr txBox="true"/>
+          <p:cNvPr id="11" name="TextBox 11"/>
+          <p:cNvSpPr txBox="1"/>
           <p:nvPr/>
         </p:nvSpPr>
         <p:spPr>
-          <a:xfrm rot="0">
+          <a:xfrm>
             <a:off x="14292929" y="8557355"/>
             <a:ext cx="3025626" cy="448351"/>
           </a:xfrm>
@@ -9022,7 +9063,7 @@
           </a:prstGeom>
         </p:spPr>
         <p:txBody>
-          <a:bodyPr anchor="t" rtlCol="false" tIns="0" lIns="0" bIns="0" rIns="0">
+          <a:bodyPr lIns="0" tIns="0" rIns="0" bIns="0" rtlCol="0" anchor="t">
             <a:spAutoFit/>
           </a:bodyPr>
           <a:lstStyle/>
@@ -9033,7 +9074,7 @@
               </a:lnSpc>
             </a:pPr>
             <a:r>
-              <a:rPr lang="en-US" b="true" sz="2497">
+              <a:rPr lang="en-US" sz="2497" b="1">
                 <a:solidFill>
                   <a:srgbClr val="F7F9FC"/>
                 </a:solidFill>
